--- a/deck/SHB-CreditOps-EvidenceGraph-pitch.pptx
+++ b/deck/SHB-CreditOps-EvidenceGraph-pitch.pptx
@@ -3588,6 +3588,14 @@
 <file path=ppt/slides/slide1.xml><?xml version="1.0" encoding="utf-8"?>
 <p:sld xmlns:a="http://schemas.openxmlformats.org/drawingml/2006/main" xmlns:p="http://schemas.openxmlformats.org/presentationml/2006/main" xmlns:r="http://schemas.openxmlformats.org/officeDocument/2006/relationships">
   <p:cSld>
+    <p:bg>
+      <p:bgPr>
+        <a:solidFill>
+          <a:srgbClr val="0B2D5B"/>
+        </a:solidFill>
+        <a:effectLst/>
+      </p:bgPr>
+    </p:bg>
     <p:spTree>
       <p:nvGrpSpPr>
         <p:cNvPr id="1" name=""/>
@@ -3604,7 +3612,7 @@
         <p:spPr>
           <a:xfrm>
             <a:off x="457200" y="228600"/>
-            <a:ext cx="11247120" cy="914400"/>
+            <a:ext cx="11247120" cy="1051560"/>
           </a:xfrm>
           <a:prstGeom prst="rect">
             <a:avLst/>
@@ -3619,9 +3627,9 @@
           <a:p>
             <a:pPr algn="l"/>
             <a:r>
-              <a:rPr sz="2800" b="1">
-                <a:solidFill>
-                  <a:srgbClr val="0B2D5B"/>
+              <a:rPr sz="2800" b="1" i="0">
+                <a:solidFill>
+                  <a:srgbClr val="FFFFFF"/>
                 </a:solidFill>
                 <a:latin typeface="Segoe UI"/>
               </a:rPr>
@@ -3642,10 +3650,12 @@
             <a:ext cx="4937760" cy="2011680"/>
           </a:xfrm>
           <a:prstGeom prst="roundRect">
-            <a:avLst/>
+            <a:avLst>
+              <a:gd name="adj" fmla="val 10000"/>
+            </a:avLst>
           </a:prstGeom>
           <a:solidFill>
-            <a:srgbClr val="0B2D5B"/>
+            <a:srgbClr val="FFFFFF"/>
           </a:solidFill>
           <a:ln>
             <a:noFill/>
@@ -3669,11 +3679,11 @@
           <a:bodyPr rtlCol="0" anchor="ctr" wrap="square"/>
           <a:lstStyle/>
           <a:p>
-            <a:pPr algn="ctr"/>
-            <a:r>
-              <a:rPr sz="1700" b="0">
-                <a:solidFill>
-                  <a:srgbClr val="FFFFFF"/>
+            <a:pPr algn="l"/>
+            <a:r>
+              <a:rPr sz="1700" b="1" i="1">
+                <a:solidFill>
+                  <a:srgbClr val="0B2D5B"/>
                 </a:solidFill>
                 <a:latin typeface="Segoe UI"/>
               </a:rPr>
@@ -3706,9 +3716,9 @@
           <a:p>
             <a:pPr algn="l"/>
             <a:r>
-              <a:rPr sz="1100" b="0">
-                <a:solidFill>
-                  <a:srgbClr val="8A8A8A"/>
+              <a:rPr sz="1100" b="0" i="0">
+                <a:solidFill>
+                  <a:srgbClr val="CADCFC"/>
                 </a:solidFill>
                 <a:latin typeface="Segoe UI"/>
               </a:rPr>
@@ -3728,11 +3738,11 @@
             <a:off x="6217920" y="1554480"/>
             <a:ext cx="1783080" cy="914400"/>
           </a:xfrm>
-          <a:prstGeom prst="roundRect">
+          <a:prstGeom prst="foldedCorner">
             <a:avLst/>
           </a:prstGeom>
           <a:solidFill>
-            <a:srgbClr val="E9E9E9"/>
+            <a:srgbClr val="EAF1F9"/>
           </a:solidFill>
           <a:ln>
             <a:noFill/>
@@ -3758,9 +3768,9 @@
           <a:p>
             <a:pPr algn="ctr"/>
             <a:r>
-              <a:rPr sz="1100" b="0">
-                <a:solidFill>
-                  <a:srgbClr val="1A1A1A"/>
+              <a:rPr sz="1100" b="0" i="0">
+                <a:solidFill>
+                  <a:srgbClr val="0B2D5B"/>
                 </a:solidFill>
                 <a:latin typeface="Segoe UI"/>
               </a:rPr>
@@ -3780,11 +3790,11 @@
             <a:off x="8138160" y="1554480"/>
             <a:ext cx="1783080" cy="914400"/>
           </a:xfrm>
-          <a:prstGeom prst="roundRect">
+          <a:prstGeom prst="foldedCorner">
             <a:avLst/>
           </a:prstGeom>
           <a:solidFill>
-            <a:srgbClr val="E9E9E9"/>
+            <a:srgbClr val="EAF1F9"/>
           </a:solidFill>
           <a:ln>
             <a:noFill/>
@@ -3810,9 +3820,9 @@
           <a:p>
             <a:pPr algn="ctr"/>
             <a:r>
-              <a:rPr sz="1100" b="0">
-                <a:solidFill>
-                  <a:srgbClr val="1A1A1A"/>
+              <a:rPr sz="1100" b="0" i="0">
+                <a:solidFill>
+                  <a:srgbClr val="0B2D5B"/>
                 </a:solidFill>
                 <a:latin typeface="Segoe UI"/>
               </a:rPr>
@@ -3832,11 +3842,11 @@
             <a:off x="10058400" y="1554480"/>
             <a:ext cx="1783080" cy="914400"/>
           </a:xfrm>
-          <a:prstGeom prst="roundRect">
+          <a:prstGeom prst="foldedCorner">
             <a:avLst/>
           </a:prstGeom>
           <a:solidFill>
-            <a:srgbClr val="E9E9E9"/>
+            <a:srgbClr val="EAF1F9"/>
           </a:solidFill>
           <a:ln>
             <a:noFill/>
@@ -3862,9 +3872,9 @@
           <a:p>
             <a:pPr algn="ctr"/>
             <a:r>
-              <a:rPr sz="1100" b="0">
-                <a:solidFill>
-                  <a:srgbClr val="1A1A1A"/>
+              <a:rPr sz="1100" b="0" i="0">
+                <a:solidFill>
+                  <a:srgbClr val="0B2D5B"/>
                 </a:solidFill>
                 <a:latin typeface="Segoe UI"/>
               </a:rPr>
@@ -3884,11 +3894,11 @@
             <a:off x="6217920" y="2606040"/>
             <a:ext cx="1783080" cy="914400"/>
           </a:xfrm>
-          <a:prstGeom prst="roundRect">
+          <a:prstGeom prst="foldedCorner">
             <a:avLst/>
           </a:prstGeom>
           <a:solidFill>
-            <a:srgbClr val="E9E9E9"/>
+            <a:srgbClr val="EAF1F9"/>
           </a:solidFill>
           <a:ln>
             <a:noFill/>
@@ -3914,9 +3924,9 @@
           <a:p>
             <a:pPr algn="ctr"/>
             <a:r>
-              <a:rPr sz="1100" b="0">
-                <a:solidFill>
-                  <a:srgbClr val="1A1A1A"/>
+              <a:rPr sz="1100" b="0" i="0">
+                <a:solidFill>
+                  <a:srgbClr val="0B2D5B"/>
                 </a:solidFill>
                 <a:latin typeface="Segoe UI"/>
               </a:rPr>
@@ -3936,11 +3946,11 @@
             <a:off x="8138160" y="2606040"/>
             <a:ext cx="1783080" cy="914400"/>
           </a:xfrm>
-          <a:prstGeom prst="roundRect">
+          <a:prstGeom prst="foldedCorner">
             <a:avLst/>
           </a:prstGeom>
           <a:solidFill>
-            <a:srgbClr val="E9E9E9"/>
+            <a:srgbClr val="EAF1F9"/>
           </a:solidFill>
           <a:ln>
             <a:noFill/>
@@ -3966,9 +3976,9 @@
           <a:p>
             <a:pPr algn="ctr"/>
             <a:r>
-              <a:rPr sz="1100" b="0">
-                <a:solidFill>
-                  <a:srgbClr val="1A1A1A"/>
+              <a:rPr sz="1100" b="0" i="0">
+                <a:solidFill>
+                  <a:srgbClr val="0B2D5B"/>
                 </a:solidFill>
                 <a:latin typeface="Segoe UI"/>
               </a:rPr>
@@ -3988,11 +3998,11 @@
             <a:off x="10058400" y="2606040"/>
             <a:ext cx="1783080" cy="914400"/>
           </a:xfrm>
-          <a:prstGeom prst="roundRect">
+          <a:prstGeom prst="foldedCorner">
             <a:avLst/>
           </a:prstGeom>
           <a:solidFill>
-            <a:srgbClr val="E9E9E9"/>
+            <a:srgbClr val="EAF1F9"/>
           </a:solidFill>
           <a:ln>
             <a:noFill/>
@@ -4018,9 +4028,9 @@
           <a:p>
             <a:pPr algn="ctr"/>
             <a:r>
-              <a:rPr sz="1100" b="0">
-                <a:solidFill>
-                  <a:srgbClr val="1A1A1A"/>
+              <a:rPr sz="1100" b="0" i="0">
+                <a:solidFill>
+                  <a:srgbClr val="0B2D5B"/>
                 </a:solidFill>
                 <a:latin typeface="Segoe UI"/>
               </a:rPr>
@@ -4040,11 +4050,11 @@
             <a:off x="6217920" y="3657600"/>
             <a:ext cx="1783080" cy="914400"/>
           </a:xfrm>
-          <a:prstGeom prst="roundRect">
+          <a:prstGeom prst="foldedCorner">
             <a:avLst/>
           </a:prstGeom>
           <a:solidFill>
-            <a:srgbClr val="E9E9E9"/>
+            <a:srgbClr val="EAF1F9"/>
           </a:solidFill>
           <a:ln>
             <a:noFill/>
@@ -4070,9 +4080,9 @@
           <a:p>
             <a:pPr algn="ctr"/>
             <a:r>
-              <a:rPr sz="1100" b="0">
-                <a:solidFill>
-                  <a:srgbClr val="1A1A1A"/>
+              <a:rPr sz="1100" b="0" i="0">
+                <a:solidFill>
+                  <a:srgbClr val="0B2D5B"/>
                 </a:solidFill>
                 <a:latin typeface="Segoe UI"/>
               </a:rPr>
@@ -4092,11 +4102,11 @@
             <a:off x="8138160" y="3657600"/>
             <a:ext cx="1783080" cy="914400"/>
           </a:xfrm>
-          <a:prstGeom prst="roundRect">
+          <a:prstGeom prst="foldedCorner">
             <a:avLst/>
           </a:prstGeom>
           <a:solidFill>
-            <a:srgbClr val="E9E9E9"/>
+            <a:srgbClr val="EAF1F9"/>
           </a:solidFill>
           <a:ln>
             <a:noFill/>
@@ -4122,9 +4132,9 @@
           <a:p>
             <a:pPr algn="ctr"/>
             <a:r>
-              <a:rPr sz="1100" b="0">
-                <a:solidFill>
-                  <a:srgbClr val="1A1A1A"/>
+              <a:rPr sz="1100" b="0" i="0">
+                <a:solidFill>
+                  <a:srgbClr val="0B2D5B"/>
                 </a:solidFill>
                 <a:latin typeface="Segoe UI"/>
               </a:rPr>
@@ -4144,11 +4154,11 @@
             <a:off x="10058400" y="3657600"/>
             <a:ext cx="1783080" cy="914400"/>
           </a:xfrm>
-          <a:prstGeom prst="roundRect">
+          <a:prstGeom prst="foldedCorner">
             <a:avLst/>
           </a:prstGeom>
           <a:solidFill>
-            <a:srgbClr val="E9E9E9"/>
+            <a:srgbClr val="EAF1F9"/>
           </a:solidFill>
           <a:ln>
             <a:noFill/>
@@ -4174,9 +4184,9 @@
           <a:p>
             <a:pPr algn="ctr"/>
             <a:r>
-              <a:rPr sz="1100" b="0">
-                <a:solidFill>
-                  <a:srgbClr val="1A1A1A"/>
+              <a:rPr sz="1100" b="0" i="0">
+                <a:solidFill>
+                  <a:srgbClr val="0B2D5B"/>
                 </a:solidFill>
                 <a:latin typeface="Segoe UI"/>
               </a:rPr>
@@ -4196,11 +4206,11 @@
             <a:off x="6217920" y="4709160"/>
             <a:ext cx="1783080" cy="914400"/>
           </a:xfrm>
-          <a:prstGeom prst="roundRect">
+          <a:prstGeom prst="foldedCorner">
             <a:avLst/>
           </a:prstGeom>
           <a:solidFill>
-            <a:srgbClr val="E9E9E9"/>
+            <a:srgbClr val="EAF1F9"/>
           </a:solidFill>
           <a:ln>
             <a:noFill/>
@@ -4226,9 +4236,9 @@
           <a:p>
             <a:pPr algn="ctr"/>
             <a:r>
-              <a:rPr sz="1100" b="0">
-                <a:solidFill>
-                  <a:srgbClr val="1A1A1A"/>
+              <a:rPr sz="1100" b="0" i="0">
+                <a:solidFill>
+                  <a:srgbClr val="0B2D5B"/>
                 </a:solidFill>
                 <a:latin typeface="Segoe UI"/>
               </a:rPr>
@@ -4248,11 +4258,11 @@
             <a:off x="8138160" y="4709160"/>
             <a:ext cx="1783080" cy="914400"/>
           </a:xfrm>
-          <a:prstGeom prst="roundRect">
+          <a:prstGeom prst="foldedCorner">
             <a:avLst/>
           </a:prstGeom>
           <a:solidFill>
-            <a:srgbClr val="E9E9E9"/>
+            <a:srgbClr val="EAF1F9"/>
           </a:solidFill>
           <a:ln>
             <a:noFill/>
@@ -4278,9 +4288,9 @@
           <a:p>
             <a:pPr algn="ctr"/>
             <a:r>
-              <a:rPr sz="1100" b="0">
-                <a:solidFill>
-                  <a:srgbClr val="1A1A1A"/>
+              <a:rPr sz="1100" b="0" i="0">
+                <a:solidFill>
+                  <a:srgbClr val="0B2D5B"/>
                 </a:solidFill>
                 <a:latin typeface="Segoe UI"/>
               </a:rPr>
@@ -4300,11 +4310,11 @@
             <a:off x="10058400" y="4709160"/>
             <a:ext cx="1783080" cy="914400"/>
           </a:xfrm>
-          <a:prstGeom prst="roundRect">
+          <a:prstGeom prst="foldedCorner">
             <a:avLst/>
           </a:prstGeom>
           <a:solidFill>
-            <a:srgbClr val="E9E9E9"/>
+            <a:srgbClr val="EAF1F9"/>
           </a:solidFill>
           <a:ln>
             <a:noFill/>
@@ -4330,9 +4340,9 @@
           <a:p>
             <a:pPr algn="ctr"/>
             <a:r>
-              <a:rPr sz="1100" b="0">
-                <a:solidFill>
-                  <a:srgbClr val="1A1A1A"/>
+              <a:rPr sz="1100" b="0" i="0">
+                <a:solidFill>
+                  <a:srgbClr val="0B2D5B"/>
                 </a:solidFill>
                 <a:latin typeface="Segoe UI"/>
               </a:rPr>
@@ -4349,8 +4359,8 @@
         </p:nvSpPr>
         <p:spPr>
           <a:xfrm>
-            <a:off x="457200" y="6400800"/>
-            <a:ext cx="11247120" cy="411480"/>
+            <a:off x="457200" y="6355080"/>
+            <a:ext cx="11247120" cy="457200"/>
           </a:xfrm>
           <a:prstGeom prst="rect">
             <a:avLst/>
@@ -4365,9 +4375,9 @@
           <a:p>
             <a:pPr algn="l"/>
             <a:r>
-              <a:rPr sz="800" b="0">
-                <a:solidFill>
-                  <a:srgbClr val="8A8A8A"/>
+              <a:rPr sz="700" b="0" i="0">
+                <a:solidFill>
+                  <a:srgbClr val="CADCFC"/>
                 </a:solidFill>
                 <a:latin typeface="Segoe UI"/>
               </a:rPr>
@@ -4377,9 +4387,9 @@
           <a:p>
             <a:pPr algn="l"/>
             <a:r>
-              <a:rPr sz="800" b="0">
-                <a:solidFill>
-                  <a:srgbClr val="8A8A8A"/>
+              <a:rPr sz="700" b="0" i="0">
+                <a:solidFill>
+                  <a:srgbClr val="CADCFC"/>
                 </a:solidFill>
                 <a:latin typeface="Segoe UI"/>
               </a:rPr>
@@ -4415,7 +4425,7 @@
         <p:spPr>
           <a:xfrm>
             <a:off x="457200" y="228600"/>
-            <a:ext cx="11247120" cy="914400"/>
+            <a:ext cx="11247120" cy="1051560"/>
           </a:xfrm>
           <a:prstGeom prst="rect">
             <a:avLst/>
@@ -4430,7 +4440,7 @@
           <a:p>
             <a:pPr algn="l"/>
             <a:r>
-              <a:rPr sz="2800" b="1">
+              <a:rPr sz="2800" b="1" i="0">
                 <a:solidFill>
                   <a:srgbClr val="0B2D5B"/>
                 </a:solidFill>
@@ -4453,7 +4463,9 @@
             <a:ext cx="7863840" cy="777240"/>
           </a:xfrm>
           <a:prstGeom prst="roundRect">
-            <a:avLst/>
+            <a:avLst>
+              <a:gd name="adj" fmla="val 10000"/>
+            </a:avLst>
           </a:prstGeom>
           <a:solidFill>
             <a:srgbClr val="0B2D5B"/>
@@ -4482,7 +4494,7 @@
           <a:p>
             <a:pPr algn="ctr"/>
             <a:r>
-              <a:rPr sz="1100" b="0">
+              <a:rPr sz="1100" b="0" i="0">
                 <a:solidFill>
                   <a:srgbClr val="FFFFFF"/>
                 </a:solidFill>
@@ -4505,7 +4517,63 @@
             <a:ext cx="7863840" cy="777240"/>
           </a:xfrm>
           <a:prstGeom prst="roundRect">
-            <a:avLst/>
+            <a:avLst>
+              <a:gd name="adj" fmla="val 10000"/>
+            </a:avLst>
+          </a:prstGeom>
+          <a:solidFill>
+            <a:srgbClr val="1F4E8C"/>
+          </a:solidFill>
+          <a:ln>
+            <a:noFill/>
+          </a:ln>
+        </p:spPr>
+        <p:style>
+          <a:lnRef idx="1">
+            <a:schemeClr val="accent1"/>
+          </a:lnRef>
+          <a:fillRef idx="3">
+            <a:schemeClr val="accent1"/>
+          </a:fillRef>
+          <a:effectRef idx="2">
+            <a:schemeClr val="accent1"/>
+          </a:effectRef>
+          <a:fontRef idx="minor">
+            <a:schemeClr val="lt1"/>
+          </a:fontRef>
+        </p:style>
+        <p:txBody>
+          <a:bodyPr rtlCol="0" anchor="ctr" wrap="square"/>
+          <a:lstStyle/>
+          <a:p>
+            <a:pPr algn="ctr"/>
+            <a:r>
+              <a:rPr sz="1100" b="0" i="0">
+                <a:solidFill>
+                  <a:srgbClr val="FFFFFF"/>
+                </a:solidFill>
+                <a:latin typeface="Segoe UI"/>
+              </a:rPr>
+              <a:t>Cloud Run — FastAPI + creditops-worker · máy trạng thái xác định · cổng mô hình trung lập</a:t>
+            </a:r>
+          </a:p>
+        </p:txBody>
+      </p:sp>
+      <p:sp>
+        <p:nvSpPr>
+          <p:cNvPr id="5" name="band"/>
+          <p:cNvSpPr/>
+          <p:nvPr/>
+        </p:nvSpPr>
+        <p:spPr>
+          <a:xfrm>
+            <a:off x="548640" y="3108960"/>
+            <a:ext cx="7863840" cy="777240"/>
+          </a:xfrm>
+          <a:prstGeom prst="roundRect">
+            <a:avLst>
+              <a:gd name="adj" fmla="val 10000"/>
+            </a:avLst>
           </a:prstGeom>
           <a:solidFill>
             <a:srgbClr val="0B2D5B"/>
@@ -4534,33 +4602,35 @@
           <a:p>
             <a:pPr algn="ctr"/>
             <a:r>
-              <a:rPr sz="1100" b="0">
+              <a:rPr sz="1100" b="0" i="0">
                 <a:solidFill>
                   <a:srgbClr val="FFFFFF"/>
                 </a:solidFill>
                 <a:latin typeface="Segoe UI"/>
               </a:rPr>
-              <a:t>Cloud Run — FastAPI + creditops-worker · máy trạng thái xác định · cổng mô hình trung lập</a:t>
-            </a:r>
-          </a:p>
-        </p:txBody>
-      </p:sp>
-      <p:sp>
-        <p:nvSpPr>
-          <p:cNvPr id="5" name="band"/>
+              <a:t>Supabase — Postgres (Digital Twin + EvidenceGraph) · Queues · Storage riêng tư · pgvector</a:t>
+            </a:r>
+          </a:p>
+        </p:txBody>
+      </p:sp>
+      <p:sp>
+        <p:nvSpPr>
+          <p:cNvPr id="6" name="band"/>
           <p:cNvSpPr/>
           <p:nvPr/>
         </p:nvSpPr>
         <p:spPr>
           <a:xfrm>
-            <a:off x="548640" y="3108960"/>
+            <a:off x="548640" y="4023360"/>
             <a:ext cx="7863840" cy="777240"/>
           </a:xfrm>
           <a:prstGeom prst="roundRect">
-            <a:avLst/>
+            <a:avLst>
+              <a:gd name="adj" fmla="val 10000"/>
+            </a:avLst>
           </a:prstGeom>
           <a:solidFill>
-            <a:srgbClr val="0B2D5B"/>
+            <a:srgbClr val="1F4E8C"/>
           </a:solidFill>
           <a:ln>
             <a:noFill/>
@@ -4586,33 +4656,35 @@
           <a:p>
             <a:pPr algn="ctr"/>
             <a:r>
-              <a:rPr sz="1100" b="0">
+              <a:rPr sz="1100" b="0" i="0">
                 <a:solidFill>
                   <a:srgbClr val="FFFFFF"/>
                 </a:solidFill>
                 <a:latin typeface="Segoe UI"/>
               </a:rPr>
-              <a:t>Supabase — Postgres (Digital Twin + EvidenceGraph) · Queues · Storage riêng tư · pgvector</a:t>
-            </a:r>
-          </a:p>
-        </p:txBody>
-      </p:sp>
-      <p:sp>
-        <p:nvSpPr>
-          <p:cNvPr id="6" name="band"/>
+              <a:t>FPT AI Factory — suy luận có quản lý (ứng viên: Qwen3-30B-A3B, SaoLa3.1-medium, FPT.AI-KIE v1.7, Table-Parsing v1.1, Qwen2.5-VL, e5-large / Vietnamese_Embedding)</a:t>
+            </a:r>
+          </a:p>
+        </p:txBody>
+      </p:sp>
+      <p:sp>
+        <p:nvSpPr>
+          <p:cNvPr id="7" name="panel"/>
           <p:cNvSpPr/>
           <p:nvPr/>
         </p:nvSpPr>
         <p:spPr>
           <a:xfrm>
-            <a:off x="548640" y="4023360"/>
-            <a:ext cx="7863840" cy="777240"/>
+            <a:off x="8503920" y="1143000"/>
+            <a:ext cx="3291840" cy="3154680"/>
           </a:xfrm>
           <a:prstGeom prst="roundRect">
-            <a:avLst/>
+            <a:avLst>
+              <a:gd name="adj" fmla="val 6000"/>
+            </a:avLst>
           </a:prstGeom>
           <a:solidFill>
-            <a:srgbClr val="0B2D5B"/>
+            <a:srgbClr val="EAF1F9"/>
           </a:solidFill>
           <a:ln>
             <a:noFill/>
@@ -4633,25 +4705,16 @@
           </a:fontRef>
         </p:style>
         <p:txBody>
-          <a:bodyPr rtlCol="0" anchor="ctr" wrap="square"/>
+          <a:bodyPr rtlCol="0" anchor="ctr"/>
           <a:lstStyle/>
           <a:p>
             <a:pPr algn="ctr"/>
-            <a:r>
-              <a:rPr sz="1100" b="0">
-                <a:solidFill>
-                  <a:srgbClr val="FFFFFF"/>
-                </a:solidFill>
-                <a:latin typeface="Segoe UI"/>
-              </a:rPr>
-              <a:t>FPT AI Factory — suy luận có quản lý (ứng viên: Qwen3-30B-A3B, SaoLa3.1-medium, FPT.AI-KIE v1.7, Table-Parsing v1.1, Qwen2.5-VL, e5-large / Vietnamese_Embedding)</a:t>
-            </a:r>
-          </a:p>
-        </p:txBody>
-      </p:sp>
-      <p:sp>
-        <p:nvSpPr>
-          <p:cNvPr id="7" name="TextBox 6"/>
+          </a:p>
+        </p:txBody>
+      </p:sp>
+      <p:sp>
+        <p:nvSpPr>
+          <p:cNvPr id="8" name="TextBox 7"/>
           <p:cNvSpPr txBox="1"/>
           <p:nvPr/>
         </p:nvSpPr>
@@ -4673,7 +4736,7 @@
           <a:p>
             <a:pPr algn="l"/>
             <a:r>
-              <a:rPr sz="1100" b="1">
+              <a:rPr sz="1100" b="1" i="0">
                 <a:solidFill>
                   <a:srgbClr val="0B2D5B"/>
                 </a:solidFill>
@@ -4686,7 +4749,7 @@
       </p:sp>
       <p:sp>
         <p:nvSpPr>
-          <p:cNvPr id="8" name="bullets"/>
+          <p:cNvPr id="9" name="bullets"/>
           <p:cNvSpPr txBox="1"/>
           <p:nvPr/>
         </p:nvSpPr>
@@ -4706,11 +4769,18 @@
           </a:bodyPr>
           <a:lstStyle/>
           <a:p>
-            <a:pPr algn="l"/>
-            <a:r>
-              <a:rPr sz="1100" b="0">
-                <a:solidFill>
-                  <a:srgbClr val="1A1A1A"/>
+            <a:pPr algn="l">
+              <a:lnSpc>
+                <a:spcPct val="112000"/>
+              </a:lnSpc>
+              <a:spcAft>
+                <a:spcPts val="500"/>
+              </a:spcAft>
+            </a:pPr>
+            <a:r>
+              <a:rPr sz="1100" b="0" i="0">
+                <a:solidFill>
+                  <a:srgbClr val="445063"/>
                 </a:solidFill>
                 <a:latin typeface="Segoe UI"/>
               </a:rPr>
@@ -4718,11 +4788,18 @@
             </a:r>
           </a:p>
           <a:p>
-            <a:pPr algn="l"/>
-            <a:r>
-              <a:rPr sz="1100" b="0">
-                <a:solidFill>
-                  <a:srgbClr val="1A1A1A"/>
+            <a:pPr algn="l">
+              <a:lnSpc>
+                <a:spcPct val="112000"/>
+              </a:lnSpc>
+              <a:spcAft>
+                <a:spcPts val="500"/>
+              </a:spcAft>
+            </a:pPr>
+            <a:r>
+              <a:rPr sz="1100" b="0" i="0">
+                <a:solidFill>
+                  <a:srgbClr val="445063"/>
                 </a:solidFill>
                 <a:latin typeface="Segoe UI"/>
               </a:rPr>
@@ -4730,11 +4807,18 @@
             </a:r>
           </a:p>
           <a:p>
-            <a:pPr algn="l"/>
-            <a:r>
-              <a:rPr sz="1100" b="0">
-                <a:solidFill>
-                  <a:srgbClr val="1A1A1A"/>
+            <a:pPr algn="l">
+              <a:lnSpc>
+                <a:spcPct val="112000"/>
+              </a:lnSpc>
+              <a:spcAft>
+                <a:spcPts val="500"/>
+              </a:spcAft>
+            </a:pPr>
+            <a:r>
+              <a:rPr sz="1100" b="0" i="0">
+                <a:solidFill>
+                  <a:srgbClr val="445063"/>
                 </a:solidFill>
                 <a:latin typeface="Segoe UI"/>
               </a:rPr>
@@ -4745,7 +4829,7 @@
       </p:sp>
       <p:sp>
         <p:nvSpPr>
-          <p:cNvPr id="9" name="TextBox 8"/>
+          <p:cNvPr id="10" name="TextBox 9"/>
           <p:cNvSpPr txBox="1"/>
           <p:nvPr/>
         </p:nvSpPr>
@@ -4767,7 +4851,7 @@
           <a:p>
             <a:pPr algn="l"/>
             <a:r>
-              <a:rPr sz="1100" b="0">
+              <a:rPr sz="1100" b="0" i="0">
                 <a:solidFill>
                   <a:srgbClr val="8A8A8A"/>
                 </a:solidFill>
@@ -4780,20 +4864,22 @@
       </p:sp>
       <p:sp>
         <p:nvSpPr>
-          <p:cNvPr id="10" name="killer"/>
+          <p:cNvPr id="11" name="killer"/>
           <p:cNvSpPr/>
           <p:nvPr/>
         </p:nvSpPr>
         <p:spPr>
           <a:xfrm>
-            <a:off x="457200" y="5623560"/>
-            <a:ext cx="11247120" cy="685800"/>
+            <a:off x="457200" y="5596128"/>
+            <a:ext cx="11247120" cy="713232"/>
           </a:xfrm>
           <a:prstGeom prst="roundRect">
-            <a:avLst/>
+            <a:avLst>
+              <a:gd name="adj" fmla="val 10000"/>
+            </a:avLst>
           </a:prstGeom>
           <a:solidFill>
-            <a:srgbClr val="F7941D"/>
+            <a:srgbClr val="EAF1F9"/>
           </a:solidFill>
           <a:ln>
             <a:noFill/>
@@ -4819,9 +4905,9 @@
           <a:p>
             <a:pPr algn="ctr"/>
             <a:r>
-              <a:rPr sz="1700" b="1">
-                <a:solidFill>
-                  <a:srgbClr val="FFFFFF"/>
+              <a:rPr sz="1700" b="1" i="1">
+                <a:solidFill>
+                  <a:srgbClr val="0B2D5B"/>
                 </a:solidFill>
                 <a:latin typeface="Segoe UI"/>
               </a:rPr>
@@ -4832,14 +4918,14 @@
       </p:sp>
       <p:sp>
         <p:nvSpPr>
-          <p:cNvPr id="11" name="footer"/>
+          <p:cNvPr id="12" name="footer"/>
           <p:cNvSpPr txBox="1"/>
           <p:nvPr/>
         </p:nvSpPr>
         <p:spPr>
           <a:xfrm>
-            <a:off x="457200" y="6400800"/>
-            <a:ext cx="11247120" cy="411480"/>
+            <a:off x="457200" y="6355080"/>
+            <a:ext cx="11247120" cy="457200"/>
           </a:xfrm>
           <a:prstGeom prst="rect">
             <a:avLst/>
@@ -4854,7 +4940,7 @@
           <a:p>
             <a:pPr algn="l"/>
             <a:r>
-              <a:rPr sz="800" b="0">
+              <a:rPr sz="700" b="0" i="0">
                 <a:solidFill>
                   <a:srgbClr val="8A8A8A"/>
                 </a:solidFill>
@@ -4892,7 +4978,7 @@
         <p:spPr>
           <a:xfrm>
             <a:off x="457200" y="228600"/>
-            <a:ext cx="11247120" cy="914400"/>
+            <a:ext cx="11247120" cy="1051560"/>
           </a:xfrm>
           <a:prstGeom prst="rect">
             <a:avLst/>
@@ -4907,7 +4993,7 @@
           <a:p>
             <a:pPr algn="l"/>
             <a:r>
-              <a:rPr sz="2800" b="1">
+              <a:rPr sz="2800" b="1" i="0">
                 <a:solidFill>
                   <a:srgbClr val="0B2D5B"/>
                 </a:solidFill>
@@ -5186,7 +5272,7 @@
                   </a:txBody>
                   <a:tcPr>
                     <a:solidFill>
-                      <a:srgbClr val="FFFFFF"/>
+                      <a:srgbClr val="EAF1F9"/>
                     </a:solidFill>
                   </a:tcPr>
                 </a:tc>
@@ -5208,7 +5294,7 @@
                   </a:txBody>
                   <a:tcPr>
                     <a:solidFill>
-                      <a:srgbClr val="FFFFFF"/>
+                      <a:srgbClr val="EAF1F9"/>
                     </a:solidFill>
                   </a:tcPr>
                 </a:tc>
@@ -5230,7 +5316,7 @@
                   </a:txBody>
                   <a:tcPr>
                     <a:solidFill>
-                      <a:srgbClr val="FFFFFF"/>
+                      <a:srgbClr val="EAF1F9"/>
                     </a:solidFill>
                   </a:tcPr>
                 </a:tc>
@@ -5252,7 +5338,7 @@
                   </a:txBody>
                   <a:tcPr>
                     <a:solidFill>
-                      <a:srgbClr val="FFFFFF"/>
+                      <a:srgbClr val="EAF1F9"/>
                     </a:solidFill>
                   </a:tcPr>
                 </a:tc>
@@ -5274,7 +5360,7 @@
                   </a:txBody>
                   <a:tcPr>
                     <a:solidFill>
-                      <a:srgbClr val="FFFFFF"/>
+                      <a:srgbClr val="EAF1F9"/>
                     </a:solidFill>
                   </a:tcPr>
                 </a:tc>
@@ -5410,7 +5496,7 @@
                   </a:txBody>
                   <a:tcPr>
                     <a:solidFill>
-                      <a:srgbClr val="FFFFFF"/>
+                      <a:srgbClr val="EAF1F9"/>
                     </a:solidFill>
                   </a:tcPr>
                 </a:tc>
@@ -5432,7 +5518,7 @@
                   </a:txBody>
                   <a:tcPr>
                     <a:solidFill>
-                      <a:srgbClr val="FFFFFF"/>
+                      <a:srgbClr val="EAF1F9"/>
                     </a:solidFill>
                   </a:tcPr>
                 </a:tc>
@@ -5454,7 +5540,7 @@
                   </a:txBody>
                   <a:tcPr>
                     <a:solidFill>
-                      <a:srgbClr val="FFFFFF"/>
+                      <a:srgbClr val="EAF1F9"/>
                     </a:solidFill>
                   </a:tcPr>
                 </a:tc>
@@ -5476,7 +5562,7 @@
                   </a:txBody>
                   <a:tcPr>
                     <a:solidFill>
-                      <a:srgbClr val="FFFFFF"/>
+                      <a:srgbClr val="EAF1F9"/>
                     </a:solidFill>
                   </a:tcPr>
                 </a:tc>
@@ -5498,7 +5584,7 @@
                   </a:txBody>
                   <a:tcPr>
                     <a:solidFill>
-                      <a:srgbClr val="FFFFFF"/>
+                      <a:srgbClr val="EAF1F9"/>
                     </a:solidFill>
                   </a:tcPr>
                 </a:tc>
@@ -5634,7 +5720,7 @@
                   </a:txBody>
                   <a:tcPr>
                     <a:solidFill>
-                      <a:srgbClr val="FFFFFF"/>
+                      <a:srgbClr val="EAF1F9"/>
                     </a:solidFill>
                   </a:tcPr>
                 </a:tc>
@@ -5656,7 +5742,7 @@
                   </a:txBody>
                   <a:tcPr>
                     <a:solidFill>
-                      <a:srgbClr val="FFFFFF"/>
+                      <a:srgbClr val="EAF1F9"/>
                     </a:solidFill>
                   </a:tcPr>
                 </a:tc>
@@ -5678,7 +5764,7 @@
                   </a:txBody>
                   <a:tcPr>
                     <a:solidFill>
-                      <a:srgbClr val="FFFFFF"/>
+                      <a:srgbClr val="EAF1F9"/>
                     </a:solidFill>
                   </a:tcPr>
                 </a:tc>
@@ -5700,7 +5786,7 @@
                   </a:txBody>
                   <a:tcPr>
                     <a:solidFill>
-                      <a:srgbClr val="FFFFFF"/>
+                      <a:srgbClr val="EAF1F9"/>
                     </a:solidFill>
                   </a:tcPr>
                 </a:tc>
@@ -5722,7 +5808,7 @@
                   </a:txBody>
                   <a:tcPr>
                     <a:solidFill>
-                      <a:srgbClr val="FFFFFF"/>
+                      <a:srgbClr val="EAF1F9"/>
                     </a:solidFill>
                   </a:tcPr>
                 </a:tc>
@@ -5851,8 +5937,8 @@
         </p:nvSpPr>
         <p:spPr>
           <a:xfrm>
-            <a:off x="457200" y="6400800"/>
-            <a:ext cx="11247120" cy="411480"/>
+            <a:off x="457200" y="6355080"/>
+            <a:ext cx="11247120" cy="457200"/>
           </a:xfrm>
           <a:prstGeom prst="rect">
             <a:avLst/>
@@ -5867,7 +5953,7 @@
           <a:p>
             <a:pPr algn="l"/>
             <a:r>
-              <a:rPr sz="800" b="0">
+              <a:rPr sz="700" b="0" i="0">
                 <a:solidFill>
                   <a:srgbClr val="8A8A8A"/>
                 </a:solidFill>
@@ -5905,7 +5991,7 @@
         <p:spPr>
           <a:xfrm>
             <a:off x="457200" y="228600"/>
-            <a:ext cx="11247120" cy="914400"/>
+            <a:ext cx="11247120" cy="1051560"/>
           </a:xfrm>
           <a:prstGeom prst="rect">
             <a:avLst/>
@@ -5920,7 +6006,7 @@
           <a:p>
             <a:pPr algn="l"/>
             <a:r>
-              <a:rPr sz="2800" b="1">
+              <a:rPr sz="2800" b="1" i="0">
                 <a:solidFill>
                   <a:srgbClr val="0B2D5B"/>
                 </a:solidFill>
@@ -5940,8 +6026,8 @@
           <p:nvPr/>
         </p:nvGraphicFramePr>
         <p:xfrm>
-          <a:off x="457200" y="1234440"/>
-          <a:ext cx="11247120" cy="3566160"/>
+          <a:off x="457200" y="1325880"/>
+          <a:ext cx="11247120" cy="3520440"/>
         </p:xfrm>
         <a:graphic>
           <a:graphicData uri="http://schemas.openxmlformats.org/drawingml/2006/table">
@@ -5953,7 +6039,7 @@
                 <a:gridCol w="5623560"/>
                 <a:gridCol w="5623560"/>
               </a:tblGrid>
-              <a:tr h="509451">
+              <a:tr h="502920">
                 <a:tc>
                   <a:txBody>
                     <a:bodyPr/>
@@ -5999,7 +6085,7 @@
                   </a:tcPr>
                 </a:tc>
               </a:tr>
-              <a:tr h="509451">
+              <a:tr h="502920">
                 <a:tc>
                   <a:txBody>
                     <a:bodyPr/>
@@ -6045,7 +6131,7 @@
                   </a:tcPr>
                 </a:tc>
               </a:tr>
-              <a:tr h="509451">
+              <a:tr h="502920">
                 <a:tc>
                   <a:txBody>
                     <a:bodyPr/>
@@ -6064,7 +6150,7 @@
                   </a:txBody>
                   <a:tcPr>
                     <a:solidFill>
-                      <a:srgbClr val="FFFFFF"/>
+                      <a:srgbClr val="EAF1F9"/>
                     </a:solidFill>
                   </a:tcPr>
                 </a:tc>
@@ -6086,12 +6172,12 @@
                   </a:txBody>
                   <a:tcPr>
                     <a:solidFill>
-                      <a:srgbClr val="FFFFFF"/>
+                      <a:srgbClr val="EAF1F9"/>
                     </a:solidFill>
                   </a:tcPr>
                 </a:tc>
               </a:tr>
-              <a:tr h="509451">
+              <a:tr h="502920">
                 <a:tc>
                   <a:txBody>
                     <a:bodyPr/>
@@ -6137,7 +6223,7 @@
                   </a:tcPr>
                 </a:tc>
               </a:tr>
-              <a:tr h="509451">
+              <a:tr h="502920">
                 <a:tc>
                   <a:txBody>
                     <a:bodyPr/>
@@ -6156,7 +6242,7 @@
                   </a:txBody>
                   <a:tcPr>
                     <a:solidFill>
-                      <a:srgbClr val="FFFFFF"/>
+                      <a:srgbClr val="EAF1F9"/>
                     </a:solidFill>
                   </a:tcPr>
                 </a:tc>
@@ -6178,12 +6264,12 @@
                   </a:txBody>
                   <a:tcPr>
                     <a:solidFill>
-                      <a:srgbClr val="FFFFFF"/>
+                      <a:srgbClr val="EAF1F9"/>
                     </a:solidFill>
                   </a:tcPr>
                 </a:tc>
               </a:tr>
-              <a:tr h="509451">
+              <a:tr h="502920">
                 <a:tc>
                   <a:txBody>
                     <a:bodyPr/>
@@ -6229,7 +6315,7 @@
                   </a:tcPr>
                 </a:tc>
               </a:tr>
-              <a:tr h="509454">
+              <a:tr h="502920">
                 <a:tc>
                   <a:txBody>
                     <a:bodyPr/>
@@ -6248,7 +6334,7 @@
                   </a:txBody>
                   <a:tcPr>
                     <a:solidFill>
-                      <a:srgbClr val="FFFFFF"/>
+                      <a:srgbClr val="EAF1F9"/>
                     </a:solidFill>
                   </a:tcPr>
                 </a:tc>
@@ -6270,7 +6356,7 @@
                   </a:txBody>
                   <a:tcPr>
                     <a:solidFill>
-                      <a:srgbClr val="FFFFFF"/>
+                      <a:srgbClr val="EAF1F9"/>
                     </a:solidFill>
                   </a:tcPr>
                 </a:tc>
@@ -6291,7 +6377,9 @@
             <a:ext cx="2743200" cy="914400"/>
           </a:xfrm>
           <a:prstGeom prst="roundRect">
-            <a:avLst/>
+            <a:avLst>
+              <a:gd name="adj" fmla="val 10000"/>
+            </a:avLst>
           </a:prstGeom>
           <a:solidFill>
             <a:srgbClr val="F7941D"/>
@@ -6320,9 +6408,9 @@
           <a:p>
             <a:pPr algn="ctr"/>
             <a:r>
-              <a:rPr sz="1100" b="0">
-                <a:solidFill>
-                  <a:srgbClr val="FFFFFF"/>
+              <a:rPr sz="1100" b="1" i="0">
+                <a:solidFill>
+                  <a:srgbClr val="0B2D5B"/>
                 </a:solidFill>
                 <a:latin typeface="Segoe UI"/>
               </a:rPr>
@@ -6343,7 +6431,9 @@
             <a:ext cx="2743200" cy="914400"/>
           </a:xfrm>
           <a:prstGeom prst="roundRect">
-            <a:avLst/>
+            <a:avLst>
+              <a:gd name="adj" fmla="val 10000"/>
+            </a:avLst>
           </a:prstGeom>
           <a:solidFill>
             <a:srgbClr val="F7941D"/>
@@ -6372,9 +6462,9 @@
           <a:p>
             <a:pPr algn="ctr"/>
             <a:r>
-              <a:rPr sz="1100" b="0">
-                <a:solidFill>
-                  <a:srgbClr val="FFFFFF"/>
+              <a:rPr sz="1100" b="1" i="0">
+                <a:solidFill>
+                  <a:srgbClr val="0B2D5B"/>
                 </a:solidFill>
                 <a:latin typeface="Segoe UI"/>
               </a:rPr>
@@ -6395,7 +6485,9 @@
             <a:ext cx="2743200" cy="914400"/>
           </a:xfrm>
           <a:prstGeom prst="roundRect">
-            <a:avLst/>
+            <a:avLst>
+              <a:gd name="adj" fmla="val 10000"/>
+            </a:avLst>
           </a:prstGeom>
           <a:solidFill>
             <a:srgbClr val="F7941D"/>
@@ -6424,9 +6516,9 @@
           <a:p>
             <a:pPr algn="ctr"/>
             <a:r>
-              <a:rPr sz="1100" b="0">
-                <a:solidFill>
-                  <a:srgbClr val="FFFFFF"/>
+              <a:rPr sz="1100" b="1" i="0">
+                <a:solidFill>
+                  <a:srgbClr val="0B2D5B"/>
                 </a:solidFill>
                 <a:latin typeface="Segoe UI"/>
               </a:rPr>
@@ -6447,7 +6539,9 @@
             <a:ext cx="2743200" cy="914400"/>
           </a:xfrm>
           <a:prstGeom prst="roundRect">
-            <a:avLst/>
+            <a:avLst>
+              <a:gd name="adj" fmla="val 10000"/>
+            </a:avLst>
           </a:prstGeom>
           <a:solidFill>
             <a:srgbClr val="F7941D"/>
@@ -6476,9 +6570,9 @@
           <a:p>
             <a:pPr algn="ctr"/>
             <a:r>
-              <a:rPr sz="1100" b="0">
-                <a:solidFill>
-                  <a:srgbClr val="FFFFFF"/>
+              <a:rPr sz="1100" b="1" i="0">
+                <a:solidFill>
+                  <a:srgbClr val="0B2D5B"/>
                 </a:solidFill>
                 <a:latin typeface="Segoe UI"/>
               </a:rPr>
@@ -6495,8 +6589,8 @@
         </p:nvSpPr>
         <p:spPr>
           <a:xfrm>
-            <a:off x="457200" y="6400800"/>
-            <a:ext cx="11247120" cy="411480"/>
+            <a:off x="457200" y="6355080"/>
+            <a:ext cx="11247120" cy="457200"/>
           </a:xfrm>
           <a:prstGeom prst="rect">
             <a:avLst/>
@@ -6511,7 +6605,7 @@
           <a:p>
             <a:pPr algn="l"/>
             <a:r>
-              <a:rPr sz="800" b="0">
+              <a:rPr sz="700" b="0" i="0">
                 <a:solidFill>
                   <a:srgbClr val="8A8A8A"/>
                 </a:solidFill>
@@ -6549,7 +6643,7 @@
         <p:spPr>
           <a:xfrm>
             <a:off x="457200" y="228600"/>
-            <a:ext cx="11247120" cy="914400"/>
+            <a:ext cx="11247120" cy="1051560"/>
           </a:xfrm>
           <a:prstGeom prst="rect">
             <a:avLst/>
@@ -6564,7 +6658,7 @@
           <a:p>
             <a:pPr algn="l"/>
             <a:r>
-              <a:rPr sz="2800" b="1">
+              <a:rPr sz="2800" b="1" i="0">
                 <a:solidFill>
                   <a:srgbClr val="0B2D5B"/>
                 </a:solidFill>
@@ -6597,11 +6691,18 @@
           </a:bodyPr>
           <a:lstStyle/>
           <a:p>
-            <a:pPr algn="l"/>
-            <a:r>
-              <a:rPr sz="1100" b="0">
-                <a:solidFill>
-                  <a:srgbClr val="1A1A1A"/>
+            <a:pPr algn="l">
+              <a:lnSpc>
+                <a:spcPct val="112000"/>
+              </a:lnSpc>
+              <a:spcAft>
+                <a:spcPts val="500"/>
+              </a:spcAft>
+            </a:pPr>
+            <a:r>
+              <a:rPr sz="1100" b="0" i="0">
+                <a:solidFill>
+                  <a:srgbClr val="445063"/>
                 </a:solidFill>
                 <a:latin typeface="Segoe UI"/>
               </a:rPr>
@@ -6609,11 +6710,18 @@
             </a:r>
           </a:p>
           <a:p>
-            <a:pPr algn="l"/>
-            <a:r>
-              <a:rPr sz="1100" b="0">
-                <a:solidFill>
-                  <a:srgbClr val="1A1A1A"/>
+            <a:pPr algn="l">
+              <a:lnSpc>
+                <a:spcPct val="112000"/>
+              </a:lnSpc>
+              <a:spcAft>
+                <a:spcPts val="500"/>
+              </a:spcAft>
+            </a:pPr>
+            <a:r>
+              <a:rPr sz="1100" b="0" i="0">
+                <a:solidFill>
+                  <a:srgbClr val="445063"/>
                 </a:solidFill>
                 <a:latin typeface="Segoe UI"/>
               </a:rPr>
@@ -6800,7 +6908,7 @@
                   </a:txBody>
                   <a:tcPr>
                     <a:solidFill>
-                      <a:srgbClr val="FFFFFF"/>
+                      <a:srgbClr val="EAF1F9"/>
                     </a:solidFill>
                   </a:tcPr>
                 </a:tc>
@@ -6822,7 +6930,7 @@
                   </a:txBody>
                   <a:tcPr>
                     <a:solidFill>
-                      <a:srgbClr val="FFFFFF"/>
+                      <a:srgbClr val="EAF1F9"/>
                     </a:solidFill>
                   </a:tcPr>
                 </a:tc>
@@ -6844,7 +6952,7 @@
                   </a:txBody>
                   <a:tcPr>
                     <a:solidFill>
-                      <a:srgbClr val="FFFFFF"/>
+                      <a:srgbClr val="EAF1F9"/>
                     </a:solidFill>
                   </a:tcPr>
                 </a:tc>
@@ -6936,7 +7044,7 @@
                   </a:txBody>
                   <a:tcPr>
                     <a:solidFill>
-                      <a:srgbClr val="FFFFFF"/>
+                      <a:srgbClr val="EAF1F9"/>
                     </a:solidFill>
                   </a:tcPr>
                 </a:tc>
@@ -6958,7 +7066,7 @@
                   </a:txBody>
                   <a:tcPr>
                     <a:solidFill>
-                      <a:srgbClr val="FFFFFF"/>
+                      <a:srgbClr val="EAF1F9"/>
                     </a:solidFill>
                   </a:tcPr>
                 </a:tc>
@@ -6980,7 +7088,7 @@
                   </a:txBody>
                   <a:tcPr>
                     <a:solidFill>
-                      <a:srgbClr val="FFFFFF"/>
+                      <a:srgbClr val="EAF1F9"/>
                     </a:solidFill>
                   </a:tcPr>
                 </a:tc>
@@ -7072,7 +7180,7 @@
                   </a:txBody>
                   <a:tcPr>
                     <a:solidFill>
-                      <a:srgbClr val="FFFFFF"/>
+                      <a:srgbClr val="EAF1F9"/>
                     </a:solidFill>
                   </a:tcPr>
                 </a:tc>
@@ -7094,7 +7202,7 @@
                   </a:txBody>
                   <a:tcPr>
                     <a:solidFill>
-                      <a:srgbClr val="FFFFFF"/>
+                      <a:srgbClr val="EAF1F9"/>
                     </a:solidFill>
                   </a:tcPr>
                 </a:tc>
@@ -7116,7 +7224,7 @@
                   </a:txBody>
                   <a:tcPr>
                     <a:solidFill>
-                      <a:srgbClr val="FFFFFF"/>
+                      <a:srgbClr val="EAF1F9"/>
                     </a:solidFill>
                   </a:tcPr>
                 </a:tc>
@@ -7133,14 +7241,16 @@
         </p:nvSpPr>
         <p:spPr>
           <a:xfrm>
-            <a:off x="457200" y="5623560"/>
-            <a:ext cx="11247120" cy="685800"/>
+            <a:off x="457200" y="5596128"/>
+            <a:ext cx="11247120" cy="713232"/>
           </a:xfrm>
           <a:prstGeom prst="roundRect">
-            <a:avLst/>
+            <a:avLst>
+              <a:gd name="adj" fmla="val 10000"/>
+            </a:avLst>
           </a:prstGeom>
           <a:solidFill>
-            <a:srgbClr val="F7941D"/>
+            <a:srgbClr val="EAF1F9"/>
           </a:solidFill>
           <a:ln>
             <a:noFill/>
@@ -7166,9 +7276,9 @@
           <a:p>
             <a:pPr algn="ctr"/>
             <a:r>
-              <a:rPr sz="1700" b="1">
-                <a:solidFill>
-                  <a:srgbClr val="FFFFFF"/>
+              <a:rPr sz="1700" b="1" i="1">
+                <a:solidFill>
+                  <a:srgbClr val="0B2D5B"/>
                 </a:solidFill>
                 <a:latin typeface="Segoe UI"/>
               </a:rPr>
@@ -7185,8 +7295,8 @@
         </p:nvSpPr>
         <p:spPr>
           <a:xfrm>
-            <a:off x="457200" y="6400800"/>
-            <a:ext cx="11247120" cy="411480"/>
+            <a:off x="457200" y="6355080"/>
+            <a:ext cx="11247120" cy="457200"/>
           </a:xfrm>
           <a:prstGeom prst="rect">
             <a:avLst/>
@@ -7201,7 +7311,7 @@
           <a:p>
             <a:pPr algn="l"/>
             <a:r>
-              <a:rPr sz="800" b="0">
+              <a:rPr sz="700" b="0" i="0">
                 <a:solidFill>
                   <a:srgbClr val="8A8A8A"/>
                 </a:solidFill>
@@ -7213,7 +7323,7 @@
           <a:p>
             <a:pPr algn="l"/>
             <a:r>
-              <a:rPr sz="800" b="0">
+              <a:rPr sz="700" b="0" i="0">
                 <a:solidFill>
                   <a:srgbClr val="8A8A8A"/>
                 </a:solidFill>
@@ -7251,7 +7361,7 @@
         <p:spPr>
           <a:xfrm>
             <a:off x="457200" y="228600"/>
-            <a:ext cx="11247120" cy="914400"/>
+            <a:ext cx="11247120" cy="1051560"/>
           </a:xfrm>
           <a:prstGeom prst="rect">
             <a:avLst/>
@@ -7266,7 +7376,7 @@
           <a:p>
             <a:pPr algn="l"/>
             <a:r>
-              <a:rPr sz="2800" b="1">
+              <a:rPr sz="2800" b="1" i="0">
                 <a:solidFill>
                   <a:srgbClr val="0B2D5B"/>
                 </a:solidFill>
@@ -7289,7 +7399,9 @@
             <a:ext cx="3749039" cy="2743200"/>
           </a:xfrm>
           <a:prstGeom prst="roundRect">
-            <a:avLst/>
+            <a:avLst>
+              <a:gd name="adj" fmla="val 10000"/>
+            </a:avLst>
           </a:prstGeom>
           <a:solidFill>
             <a:srgbClr val="0B2D5B"/>
@@ -7318,7 +7430,7 @@
           <a:p>
             <a:pPr algn="ctr"/>
             <a:r>
-              <a:rPr sz="1100" b="0">
+              <a:rPr sz="1100" b="0" i="0">
                 <a:solidFill>
                   <a:srgbClr val="FFFFFF"/>
                 </a:solidFill>
@@ -7330,7 +7442,7 @@
           <a:p>
             <a:pPr algn="ctr"/>
             <a:r>
-              <a:rPr sz="1100" b="0">
+              <a:rPr sz="1100" b="0" i="0">
                 <a:solidFill>
                   <a:srgbClr val="FFFFFF"/>
                 </a:solidFill>
@@ -7342,7 +7454,7 @@
           <a:p>
             <a:pPr algn="ctr"/>
             <a:r>
-              <a:rPr sz="1100" b="0">
+              <a:rPr sz="1100" b="0" i="0">
                 <a:solidFill>
                   <a:srgbClr val="FFFFFF"/>
                 </a:solidFill>
@@ -7365,7 +7477,9 @@
             <a:ext cx="3749039" cy="2743200"/>
           </a:xfrm>
           <a:prstGeom prst="roundRect">
-            <a:avLst/>
+            <a:avLst>
+              <a:gd name="adj" fmla="val 10000"/>
+            </a:avLst>
           </a:prstGeom>
           <a:solidFill>
             <a:srgbClr val="0B2D5B"/>
@@ -7394,7 +7508,7 @@
           <a:p>
             <a:pPr algn="ctr"/>
             <a:r>
-              <a:rPr sz="1100" b="0">
+              <a:rPr sz="1100" b="0" i="0">
                 <a:solidFill>
                   <a:srgbClr val="FFFFFF"/>
                 </a:solidFill>
@@ -7406,7 +7520,7 @@
           <a:p>
             <a:pPr algn="ctr"/>
             <a:r>
-              <a:rPr sz="1100" b="0">
+              <a:rPr sz="1100" b="0" i="0">
                 <a:solidFill>
                   <a:srgbClr val="FFFFFF"/>
                 </a:solidFill>
@@ -7418,7 +7532,7 @@
           <a:p>
             <a:pPr algn="ctr"/>
             <a:r>
-              <a:rPr sz="1100" b="0">
+              <a:rPr sz="1100" b="0" i="0">
                 <a:solidFill>
                   <a:srgbClr val="FFFFFF"/>
                 </a:solidFill>
@@ -7441,7 +7555,9 @@
             <a:ext cx="3749039" cy="2743200"/>
           </a:xfrm>
           <a:prstGeom prst="roundRect">
-            <a:avLst/>
+            <a:avLst>
+              <a:gd name="adj" fmla="val 10000"/>
+            </a:avLst>
           </a:prstGeom>
           <a:solidFill>
             <a:srgbClr val="0B2D5B"/>
@@ -7470,7 +7586,7 @@
           <a:p>
             <a:pPr algn="ctr"/>
             <a:r>
-              <a:rPr sz="1100" b="0">
+              <a:rPr sz="1100" b="0" i="0">
                 <a:solidFill>
                   <a:srgbClr val="FFFFFF"/>
                 </a:solidFill>
@@ -7482,7 +7598,7 @@
           <a:p>
             <a:pPr algn="ctr"/>
             <a:r>
-              <a:rPr sz="1100" b="0">
+              <a:rPr sz="1100" b="0" i="0">
                 <a:solidFill>
                   <a:srgbClr val="FFFFFF"/>
                 </a:solidFill>
@@ -7494,7 +7610,7 @@
           <a:p>
             <a:pPr algn="ctr"/>
             <a:r>
-              <a:rPr sz="1100" b="0">
+              <a:rPr sz="1100" b="0" i="0">
                 <a:solidFill>
                   <a:srgbClr val="FFFFFF"/>
                 </a:solidFill>
@@ -7527,11 +7643,18 @@
           </a:bodyPr>
           <a:lstStyle/>
           <a:p>
-            <a:pPr algn="l"/>
-            <a:r>
-              <a:rPr sz="1100" b="0">
-                <a:solidFill>
-                  <a:srgbClr val="1A1A1A"/>
+            <a:pPr algn="l">
+              <a:lnSpc>
+                <a:spcPct val="112000"/>
+              </a:lnSpc>
+              <a:spcAft>
+                <a:spcPts val="500"/>
+              </a:spcAft>
+            </a:pPr>
+            <a:r>
+              <a:rPr sz="1100" b="0" i="0">
+                <a:solidFill>
+                  <a:srgbClr val="445063"/>
                 </a:solidFill>
                 <a:latin typeface="Segoe UI"/>
               </a:rPr>
@@ -7539,11 +7662,18 @@
             </a:r>
           </a:p>
           <a:p>
-            <a:pPr algn="l"/>
-            <a:r>
-              <a:rPr sz="1100" b="0">
-                <a:solidFill>
-                  <a:srgbClr val="1A1A1A"/>
+            <a:pPr algn="l">
+              <a:lnSpc>
+                <a:spcPct val="112000"/>
+              </a:lnSpc>
+              <a:spcAft>
+                <a:spcPts val="500"/>
+              </a:spcAft>
+            </a:pPr>
+            <a:r>
+              <a:rPr sz="1100" b="0" i="0">
+                <a:solidFill>
+                  <a:srgbClr val="445063"/>
                 </a:solidFill>
                 <a:latin typeface="Segoe UI"/>
               </a:rPr>
@@ -7560,8 +7690,8 @@
         </p:nvSpPr>
         <p:spPr>
           <a:xfrm>
-            <a:off x="457200" y="6400800"/>
-            <a:ext cx="11247120" cy="411480"/>
+            <a:off x="457200" y="6355080"/>
+            <a:ext cx="11247120" cy="457200"/>
           </a:xfrm>
           <a:prstGeom prst="rect">
             <a:avLst/>
@@ -7576,7 +7706,7 @@
           <a:p>
             <a:pPr algn="l"/>
             <a:r>
-              <a:rPr sz="800" b="0">
+              <a:rPr sz="700" b="0" i="0">
                 <a:solidFill>
                   <a:srgbClr val="8A8A8A"/>
                 </a:solidFill>
@@ -7614,7 +7744,7 @@
         <p:spPr>
           <a:xfrm>
             <a:off x="457200" y="228600"/>
-            <a:ext cx="11247120" cy="914400"/>
+            <a:ext cx="11247120" cy="1051560"/>
           </a:xfrm>
           <a:prstGeom prst="rect">
             <a:avLst/>
@@ -7629,7 +7759,7 @@
           <a:p>
             <a:pPr algn="l"/>
             <a:r>
-              <a:rPr sz="2800" b="1">
+              <a:rPr sz="2800" b="1" i="0">
                 <a:solidFill>
                   <a:srgbClr val="0B2D5B"/>
                 </a:solidFill>
@@ -7662,11 +7792,18 @@
           </a:bodyPr>
           <a:lstStyle/>
           <a:p>
-            <a:pPr algn="l"/>
-            <a:r>
-              <a:rPr sz="1400" b="0">
-                <a:solidFill>
-                  <a:srgbClr val="1A1A1A"/>
+            <a:pPr algn="l">
+              <a:lnSpc>
+                <a:spcPct val="112000"/>
+              </a:lnSpc>
+              <a:spcAft>
+                <a:spcPts val="500"/>
+              </a:spcAft>
+            </a:pPr>
+            <a:r>
+              <a:rPr sz="1400" b="0" i="0">
+                <a:solidFill>
+                  <a:srgbClr val="445063"/>
                 </a:solidFill>
                 <a:latin typeface="Segoe UI"/>
               </a:rPr>
@@ -7674,11 +7811,18 @@
             </a:r>
           </a:p>
           <a:p>
-            <a:pPr algn="l"/>
-            <a:r>
-              <a:rPr sz="1400" b="0">
-                <a:solidFill>
-                  <a:srgbClr val="1A1A1A"/>
+            <a:pPr algn="l">
+              <a:lnSpc>
+                <a:spcPct val="112000"/>
+              </a:lnSpc>
+              <a:spcAft>
+                <a:spcPts val="500"/>
+              </a:spcAft>
+            </a:pPr>
+            <a:r>
+              <a:rPr sz="1400" b="0" i="0">
+                <a:solidFill>
+                  <a:srgbClr val="445063"/>
                 </a:solidFill>
                 <a:latin typeface="Segoe UI"/>
               </a:rPr>
@@ -7686,11 +7830,18 @@
             </a:r>
           </a:p>
           <a:p>
-            <a:pPr algn="l"/>
-            <a:r>
-              <a:rPr sz="1400" b="0">
-                <a:solidFill>
-                  <a:srgbClr val="1A1A1A"/>
+            <a:pPr algn="l">
+              <a:lnSpc>
+                <a:spcPct val="112000"/>
+              </a:lnSpc>
+              <a:spcAft>
+                <a:spcPts val="500"/>
+              </a:spcAft>
+            </a:pPr>
+            <a:r>
+              <a:rPr sz="1400" b="0" i="0">
+                <a:solidFill>
+                  <a:srgbClr val="445063"/>
                 </a:solidFill>
                 <a:latin typeface="Segoe UI"/>
               </a:rPr>
@@ -7698,11 +7849,18 @@
             </a:r>
           </a:p>
           <a:p>
-            <a:pPr algn="l"/>
-            <a:r>
-              <a:rPr sz="1400" b="0">
-                <a:solidFill>
-                  <a:srgbClr val="1A1A1A"/>
+            <a:pPr algn="l">
+              <a:lnSpc>
+                <a:spcPct val="112000"/>
+              </a:lnSpc>
+              <a:spcAft>
+                <a:spcPts val="500"/>
+              </a:spcAft>
+            </a:pPr>
+            <a:r>
+              <a:rPr sz="1400" b="0" i="0">
+                <a:solidFill>
+                  <a:srgbClr val="445063"/>
                 </a:solidFill>
                 <a:latin typeface="Segoe UI"/>
               </a:rPr>
@@ -7710,11 +7868,18 @@
             </a:r>
           </a:p>
           <a:p>
-            <a:pPr algn="l"/>
-            <a:r>
-              <a:rPr sz="1400" b="0">
-                <a:solidFill>
-                  <a:srgbClr val="1A1A1A"/>
+            <a:pPr algn="l">
+              <a:lnSpc>
+                <a:spcPct val="112000"/>
+              </a:lnSpc>
+              <a:spcAft>
+                <a:spcPts val="500"/>
+              </a:spcAft>
+            </a:pPr>
+            <a:r>
+              <a:rPr sz="1400" b="0" i="0">
+                <a:solidFill>
+                  <a:srgbClr val="445063"/>
                 </a:solidFill>
                 <a:latin typeface="Segoe UI"/>
               </a:rPr>
@@ -7722,11 +7887,18 @@
             </a:r>
           </a:p>
           <a:p>
-            <a:pPr algn="l"/>
-            <a:r>
-              <a:rPr sz="1400" b="0">
-                <a:solidFill>
-                  <a:srgbClr val="1A1A1A"/>
+            <a:pPr algn="l">
+              <a:lnSpc>
+                <a:spcPct val="112000"/>
+              </a:lnSpc>
+              <a:spcAft>
+                <a:spcPts val="500"/>
+              </a:spcAft>
+            </a:pPr>
+            <a:r>
+              <a:rPr sz="1400" b="0" i="0">
+                <a:solidFill>
+                  <a:srgbClr val="445063"/>
                 </a:solidFill>
                 <a:latin typeface="Segoe UI"/>
               </a:rPr>
@@ -7743,14 +7915,16 @@
         </p:nvSpPr>
         <p:spPr>
           <a:xfrm>
-            <a:off x="457200" y="5623560"/>
-            <a:ext cx="11247120" cy="685800"/>
+            <a:off x="457200" y="5596128"/>
+            <a:ext cx="11247120" cy="713232"/>
           </a:xfrm>
           <a:prstGeom prst="roundRect">
-            <a:avLst/>
+            <a:avLst>
+              <a:gd name="adj" fmla="val 10000"/>
+            </a:avLst>
           </a:prstGeom>
           <a:solidFill>
-            <a:srgbClr val="F7941D"/>
+            <a:srgbClr val="EAF1F9"/>
           </a:solidFill>
           <a:ln>
             <a:noFill/>
@@ -7776,9 +7950,9 @@
           <a:p>
             <a:pPr algn="ctr"/>
             <a:r>
-              <a:rPr sz="1700" b="1">
-                <a:solidFill>
-                  <a:srgbClr val="FFFFFF"/>
+              <a:rPr sz="1700" b="1" i="1">
+                <a:solidFill>
+                  <a:srgbClr val="0B2D5B"/>
                 </a:solidFill>
                 <a:latin typeface="Segoe UI"/>
               </a:rPr>
@@ -7795,8 +7969,8 @@
         </p:nvSpPr>
         <p:spPr>
           <a:xfrm>
-            <a:off x="457200" y="6400800"/>
-            <a:ext cx="11247120" cy="411480"/>
+            <a:off x="457200" y="6355080"/>
+            <a:ext cx="11247120" cy="457200"/>
           </a:xfrm>
           <a:prstGeom prst="rect">
             <a:avLst/>
@@ -7811,7 +7985,7 @@
           <a:p>
             <a:pPr algn="l"/>
             <a:r>
-              <a:rPr sz="800" b="0">
+              <a:rPr sz="700" b="0" i="0">
                 <a:solidFill>
                   <a:srgbClr val="8A8A8A"/>
                 </a:solidFill>
@@ -7849,7 +8023,7 @@
         <p:spPr>
           <a:xfrm>
             <a:off x="457200" y="228600"/>
-            <a:ext cx="11247120" cy="914400"/>
+            <a:ext cx="11247120" cy="1051560"/>
           </a:xfrm>
           <a:prstGeom prst="rect">
             <a:avLst/>
@@ -7864,7 +8038,7 @@
           <a:p>
             <a:pPr algn="l"/>
             <a:r>
-              <a:rPr sz="2800" b="1">
+              <a:rPr sz="2800" b="1" i="0">
                 <a:solidFill>
                   <a:srgbClr val="0B2D5B"/>
                 </a:solidFill>
@@ -7887,7 +8061,9 @@
             <a:ext cx="2240280" cy="2377440"/>
           </a:xfrm>
           <a:prstGeom prst="roundRect">
-            <a:avLst/>
+            <a:avLst>
+              <a:gd name="adj" fmla="val 10000"/>
+            </a:avLst>
           </a:prstGeom>
           <a:solidFill>
             <a:srgbClr val="F7941D"/>
@@ -7916,9 +8092,9 @@
           <a:p>
             <a:pPr algn="ctr"/>
             <a:r>
-              <a:rPr sz="1100" b="0">
-                <a:solidFill>
-                  <a:srgbClr val="FFFFFF"/>
+              <a:rPr sz="1100" b="1" i="0">
+                <a:solidFill>
+                  <a:srgbClr val="0B2D5B"/>
                 </a:solidFill>
                 <a:latin typeface="Segoe UI"/>
               </a:rPr>
@@ -7928,9 +8104,9 @@
           <a:p>
             <a:pPr algn="ctr"/>
             <a:r>
-              <a:rPr sz="1100" b="0">
-                <a:solidFill>
-                  <a:srgbClr val="FFFFFF"/>
+              <a:rPr sz="1100" b="1" i="0">
+                <a:solidFill>
+                  <a:srgbClr val="0B2D5B"/>
                 </a:solidFill>
                 <a:latin typeface="Segoe UI"/>
               </a:rPr>
@@ -7940,9 +8116,9 @@
           <a:p>
             <a:pPr algn="ctr"/>
             <a:r>
-              <a:rPr sz="1100" b="0">
-                <a:solidFill>
-                  <a:srgbClr val="FFFFFF"/>
+              <a:rPr sz="1100" b="1" i="0">
+                <a:solidFill>
+                  <a:srgbClr val="0B2D5B"/>
                 </a:solidFill>
                 <a:latin typeface="Segoe UI"/>
               </a:rPr>
@@ -7963,7 +8139,9 @@
             <a:ext cx="2240280" cy="2377440"/>
           </a:xfrm>
           <a:prstGeom prst="roundRect">
-            <a:avLst/>
+            <a:avLst>
+              <a:gd name="adj" fmla="val 10000"/>
+            </a:avLst>
           </a:prstGeom>
           <a:solidFill>
             <a:srgbClr val="0B2D5B"/>
@@ -7992,7 +8170,7 @@
           <a:p>
             <a:pPr algn="ctr"/>
             <a:r>
-              <a:rPr sz="1100" b="0">
+              <a:rPr sz="1100" b="0" i="0">
                 <a:solidFill>
                   <a:srgbClr val="FFFFFF"/>
                 </a:solidFill>
@@ -8004,7 +8182,7 @@
           <a:p>
             <a:pPr algn="ctr"/>
             <a:r>
-              <a:rPr sz="1100" b="0">
+              <a:rPr sz="1100" b="0" i="0">
                 <a:solidFill>
                   <a:srgbClr val="FFFFFF"/>
                 </a:solidFill>
@@ -8016,7 +8194,7 @@
           <a:p>
             <a:pPr algn="ctr"/>
             <a:r>
-              <a:rPr sz="1100" b="0">
+              <a:rPr sz="1100" b="0" i="0">
                 <a:solidFill>
                   <a:srgbClr val="FFFFFF"/>
                 </a:solidFill>
@@ -8039,7 +8217,9 @@
             <a:ext cx="2240280" cy="2377440"/>
           </a:xfrm>
           <a:prstGeom prst="roundRect">
-            <a:avLst/>
+            <a:avLst>
+              <a:gd name="adj" fmla="val 10000"/>
+            </a:avLst>
           </a:prstGeom>
           <a:solidFill>
             <a:srgbClr val="0B2D5B"/>
@@ -8068,7 +8248,7 @@
           <a:p>
             <a:pPr algn="ctr"/>
             <a:r>
-              <a:rPr sz="1100" b="0">
+              <a:rPr sz="1100" b="0" i="0">
                 <a:solidFill>
                   <a:srgbClr val="FFFFFF"/>
                 </a:solidFill>
@@ -8080,7 +8260,7 @@
           <a:p>
             <a:pPr algn="ctr"/>
             <a:r>
-              <a:rPr sz="1100" b="0">
+              <a:rPr sz="1100" b="0" i="0">
                 <a:solidFill>
                   <a:srgbClr val="FFFFFF"/>
                 </a:solidFill>
@@ -8092,7 +8272,7 @@
           <a:p>
             <a:pPr algn="ctr"/>
             <a:r>
-              <a:rPr sz="1100" b="0">
+              <a:rPr sz="1100" b="0" i="0">
                 <a:solidFill>
                   <a:srgbClr val="FFFFFF"/>
                 </a:solidFill>
@@ -8115,7 +8295,9 @@
             <a:ext cx="2240280" cy="2377440"/>
           </a:xfrm>
           <a:prstGeom prst="roundRect">
-            <a:avLst/>
+            <a:avLst>
+              <a:gd name="adj" fmla="val 10000"/>
+            </a:avLst>
           </a:prstGeom>
           <a:solidFill>
             <a:srgbClr val="0B2D5B"/>
@@ -8144,7 +8326,7 @@
           <a:p>
             <a:pPr algn="ctr"/>
             <a:r>
-              <a:rPr sz="1100" b="0">
+              <a:rPr sz="1100" b="0" i="0">
                 <a:solidFill>
                   <a:srgbClr val="FFFFFF"/>
                 </a:solidFill>
@@ -8156,7 +8338,7 @@
           <a:p>
             <a:pPr algn="ctr"/>
             <a:r>
-              <a:rPr sz="1100" b="0">
+              <a:rPr sz="1100" b="0" i="0">
                 <a:solidFill>
                   <a:srgbClr val="FFFFFF"/>
                 </a:solidFill>
@@ -8168,7 +8350,7 @@
           <a:p>
             <a:pPr algn="ctr"/>
             <a:r>
-              <a:rPr sz="1100" b="0">
+              <a:rPr sz="1100" b="0" i="0">
                 <a:solidFill>
                   <a:srgbClr val="FFFFFF"/>
                 </a:solidFill>
@@ -8191,7 +8373,9 @@
             <a:ext cx="2240280" cy="2377440"/>
           </a:xfrm>
           <a:prstGeom prst="roundRect">
-            <a:avLst/>
+            <a:avLst>
+              <a:gd name="adj" fmla="val 10000"/>
+            </a:avLst>
           </a:prstGeom>
           <a:solidFill>
             <a:srgbClr val="0B2D5B"/>
@@ -8220,7 +8404,7 @@
           <a:p>
             <a:pPr algn="ctr"/>
             <a:r>
-              <a:rPr sz="1100" b="0">
+              <a:rPr sz="1100" b="0" i="0">
                 <a:solidFill>
                   <a:srgbClr val="FFFFFF"/>
                 </a:solidFill>
@@ -8232,7 +8416,7 @@
           <a:p>
             <a:pPr algn="ctr"/>
             <a:r>
-              <a:rPr sz="1100" b="0">
+              <a:rPr sz="1100" b="0" i="0">
                 <a:solidFill>
                   <a:srgbClr val="FFFFFF"/>
                 </a:solidFill>
@@ -8244,7 +8428,7 @@
           <a:p>
             <a:pPr algn="ctr"/>
             <a:r>
-              <a:rPr sz="1100" b="0">
+              <a:rPr sz="1100" b="0" i="0">
                 <a:solidFill>
                   <a:srgbClr val="FFFFFF"/>
                 </a:solidFill>
@@ -8279,7 +8463,7 @@
           <a:p>
             <a:pPr algn="l"/>
             <a:r>
-              <a:rPr sz="1100" b="0">
+              <a:rPr sz="1100" b="0" i="0">
                 <a:solidFill>
                   <a:srgbClr val="8A8A8A"/>
                 </a:solidFill>
@@ -8298,8 +8482,8 @@
         </p:nvSpPr>
         <p:spPr>
           <a:xfrm>
-            <a:off x="457200" y="6400800"/>
-            <a:ext cx="11247120" cy="411480"/>
+            <a:off x="457200" y="6355080"/>
+            <a:ext cx="11247120" cy="457200"/>
           </a:xfrm>
           <a:prstGeom prst="rect">
             <a:avLst/>
@@ -8314,7 +8498,7 @@
           <a:p>
             <a:pPr algn="l"/>
             <a:r>
-              <a:rPr sz="800" b="0">
+              <a:rPr sz="700" b="0" i="0">
                 <a:solidFill>
                   <a:srgbClr val="8A8A8A"/>
                 </a:solidFill>
@@ -8352,7 +8536,7 @@
         <p:spPr>
           <a:xfrm>
             <a:off x="457200" y="228600"/>
-            <a:ext cx="11247120" cy="914400"/>
+            <a:ext cx="11247120" cy="1051560"/>
           </a:xfrm>
           <a:prstGeom prst="rect">
             <a:avLst/>
@@ -8367,7 +8551,7 @@
           <a:p>
             <a:pPr algn="l"/>
             <a:r>
-              <a:rPr sz="2800" b="1">
+              <a:rPr sz="2800" b="1" i="0">
                 <a:solidFill>
                   <a:srgbClr val="0B2D5B"/>
                 </a:solidFill>
@@ -8390,10 +8574,12 @@
             <a:ext cx="2240280" cy="3108960"/>
           </a:xfrm>
           <a:prstGeom prst="roundRect">
-            <a:avLst/>
+            <a:avLst>
+              <a:gd name="adj" fmla="val 10000"/>
+            </a:avLst>
           </a:prstGeom>
           <a:solidFill>
-            <a:srgbClr val="0B2D5B"/>
+            <a:srgbClr val="EAF1F9"/>
           </a:solidFill>
           <a:ln>
             <a:noFill/>
@@ -8419,9 +8605,9 @@
           <a:p>
             <a:pPr algn="ctr"/>
             <a:r>
-              <a:rPr sz="1100" b="0">
-                <a:solidFill>
-                  <a:srgbClr val="FFFFFF"/>
+              <a:rPr sz="1100" b="0" i="0">
+                <a:solidFill>
+                  <a:srgbClr val="0B2D5B"/>
                 </a:solidFill>
                 <a:latin typeface="Segoe UI"/>
               </a:rPr>
@@ -8431,9 +8617,9 @@
           <a:p>
             <a:pPr algn="ctr"/>
             <a:r>
-              <a:rPr sz="1100" b="0">
-                <a:solidFill>
-                  <a:srgbClr val="FFFFFF"/>
+              <a:rPr sz="1100" b="0" i="0">
+                <a:solidFill>
+                  <a:srgbClr val="0B2D5B"/>
                 </a:solidFill>
                 <a:latin typeface="Segoe UI"/>
               </a:rPr>
@@ -8443,9 +8629,9 @@
           <a:p>
             <a:pPr algn="ctr"/>
             <a:r>
-              <a:rPr sz="1100" b="0">
-                <a:solidFill>
-                  <a:srgbClr val="FFFFFF"/>
+              <a:rPr sz="1100" b="0" i="0">
+                <a:solidFill>
+                  <a:srgbClr val="0B2D5B"/>
                 </a:solidFill>
                 <a:latin typeface="Segoe UI"/>
               </a:rPr>
@@ -8455,9 +8641,9 @@
           <a:p>
             <a:pPr algn="ctr"/>
             <a:r>
-              <a:rPr sz="1100" b="0">
-                <a:solidFill>
-                  <a:srgbClr val="FFFFFF"/>
+              <a:rPr sz="1100" b="0" i="0">
+                <a:solidFill>
+                  <a:srgbClr val="0B2D5B"/>
                 </a:solidFill>
                 <a:latin typeface="Segoe UI"/>
               </a:rPr>
@@ -8467,9 +8653,9 @@
           <a:p>
             <a:pPr algn="ctr"/>
             <a:r>
-              <a:rPr sz="1100" b="0">
-                <a:solidFill>
-                  <a:srgbClr val="FFFFFF"/>
+              <a:rPr sz="1100" b="0" i="0">
+                <a:solidFill>
+                  <a:srgbClr val="0B2D5B"/>
                 </a:solidFill>
                 <a:latin typeface="Segoe UI"/>
               </a:rPr>
@@ -8490,10 +8676,12 @@
             <a:ext cx="2240280" cy="3108960"/>
           </a:xfrm>
           <a:prstGeom prst="roundRect">
-            <a:avLst/>
+            <a:avLst>
+              <a:gd name="adj" fmla="val 10000"/>
+            </a:avLst>
           </a:prstGeom>
           <a:solidFill>
-            <a:srgbClr val="0B2D5B"/>
+            <a:srgbClr val="EAF1F9"/>
           </a:solidFill>
           <a:ln>
             <a:noFill/>
@@ -8519,9 +8707,9 @@
           <a:p>
             <a:pPr algn="ctr"/>
             <a:r>
-              <a:rPr sz="1100" b="0">
-                <a:solidFill>
-                  <a:srgbClr val="FFFFFF"/>
+              <a:rPr sz="1100" b="0" i="0">
+                <a:solidFill>
+                  <a:srgbClr val="0B2D5B"/>
                 </a:solidFill>
                 <a:latin typeface="Segoe UI"/>
               </a:rPr>
@@ -8531,9 +8719,9 @@
           <a:p>
             <a:pPr algn="ctr"/>
             <a:r>
-              <a:rPr sz="1100" b="0">
-                <a:solidFill>
-                  <a:srgbClr val="FFFFFF"/>
+              <a:rPr sz="1100" b="0" i="0">
+                <a:solidFill>
+                  <a:srgbClr val="0B2D5B"/>
                 </a:solidFill>
                 <a:latin typeface="Segoe UI"/>
               </a:rPr>
@@ -8543,9 +8731,9 @@
           <a:p>
             <a:pPr algn="ctr"/>
             <a:r>
-              <a:rPr sz="1100" b="0">
-                <a:solidFill>
-                  <a:srgbClr val="FFFFFF"/>
+              <a:rPr sz="1100" b="0" i="0">
+                <a:solidFill>
+                  <a:srgbClr val="0B2D5B"/>
                 </a:solidFill>
                 <a:latin typeface="Segoe UI"/>
               </a:rPr>
@@ -8555,9 +8743,9 @@
           <a:p>
             <a:pPr algn="ctr"/>
             <a:r>
-              <a:rPr sz="1100" b="0">
-                <a:solidFill>
-                  <a:srgbClr val="FFFFFF"/>
+              <a:rPr sz="1100" b="0" i="0">
+                <a:solidFill>
+                  <a:srgbClr val="0B2D5B"/>
                 </a:solidFill>
                 <a:latin typeface="Segoe UI"/>
               </a:rPr>
@@ -8567,9 +8755,9 @@
           <a:p>
             <a:pPr algn="ctr"/>
             <a:r>
-              <a:rPr sz="1100" b="0">
-                <a:solidFill>
-                  <a:srgbClr val="FFFFFF"/>
+              <a:rPr sz="1100" b="0" i="0">
+                <a:solidFill>
+                  <a:srgbClr val="0B2D5B"/>
                 </a:solidFill>
                 <a:latin typeface="Segoe UI"/>
               </a:rPr>
@@ -8590,10 +8778,12 @@
             <a:ext cx="2240280" cy="3108960"/>
           </a:xfrm>
           <a:prstGeom prst="roundRect">
-            <a:avLst/>
+            <a:avLst>
+              <a:gd name="adj" fmla="val 10000"/>
+            </a:avLst>
           </a:prstGeom>
           <a:solidFill>
-            <a:srgbClr val="0B2D5B"/>
+            <a:srgbClr val="EAF1F9"/>
           </a:solidFill>
           <a:ln>
             <a:noFill/>
@@ -8619,9 +8809,9 @@
           <a:p>
             <a:pPr algn="ctr"/>
             <a:r>
-              <a:rPr sz="1100" b="0">
-                <a:solidFill>
-                  <a:srgbClr val="FFFFFF"/>
+              <a:rPr sz="1100" b="0" i="0">
+                <a:solidFill>
+                  <a:srgbClr val="0B2D5B"/>
                 </a:solidFill>
                 <a:latin typeface="Segoe UI"/>
               </a:rPr>
@@ -8631,9 +8821,9 @@
           <a:p>
             <a:pPr algn="ctr"/>
             <a:r>
-              <a:rPr sz="1100" b="0">
-                <a:solidFill>
-                  <a:srgbClr val="FFFFFF"/>
+              <a:rPr sz="1100" b="0" i="0">
+                <a:solidFill>
+                  <a:srgbClr val="0B2D5B"/>
                 </a:solidFill>
                 <a:latin typeface="Segoe UI"/>
               </a:rPr>
@@ -8643,9 +8833,9 @@
           <a:p>
             <a:pPr algn="ctr"/>
             <a:r>
-              <a:rPr sz="1100" b="0">
-                <a:solidFill>
-                  <a:srgbClr val="FFFFFF"/>
+              <a:rPr sz="1100" b="0" i="0">
+                <a:solidFill>
+                  <a:srgbClr val="0B2D5B"/>
                 </a:solidFill>
                 <a:latin typeface="Segoe UI"/>
               </a:rPr>
@@ -8655,9 +8845,9 @@
           <a:p>
             <a:pPr algn="ctr"/>
             <a:r>
-              <a:rPr sz="1100" b="0">
-                <a:solidFill>
-                  <a:srgbClr val="FFFFFF"/>
+              <a:rPr sz="1100" b="0" i="0">
+                <a:solidFill>
+                  <a:srgbClr val="0B2D5B"/>
                 </a:solidFill>
                 <a:latin typeface="Segoe UI"/>
               </a:rPr>
@@ -8667,9 +8857,9 @@
           <a:p>
             <a:pPr algn="ctr"/>
             <a:r>
-              <a:rPr sz="1100" b="0">
-                <a:solidFill>
-                  <a:srgbClr val="FFFFFF"/>
+              <a:rPr sz="1100" b="0" i="0">
+                <a:solidFill>
+                  <a:srgbClr val="0B2D5B"/>
                 </a:solidFill>
                 <a:latin typeface="Segoe UI"/>
               </a:rPr>
@@ -8690,10 +8880,12 @@
             <a:ext cx="2240280" cy="3108960"/>
           </a:xfrm>
           <a:prstGeom prst="roundRect">
-            <a:avLst/>
+            <a:avLst>
+              <a:gd name="adj" fmla="val 10000"/>
+            </a:avLst>
           </a:prstGeom>
           <a:solidFill>
-            <a:srgbClr val="0B2D5B"/>
+            <a:srgbClr val="EAF1F9"/>
           </a:solidFill>
           <a:ln>
             <a:noFill/>
@@ -8719,9 +8911,9 @@
           <a:p>
             <a:pPr algn="ctr"/>
             <a:r>
-              <a:rPr sz="1100" b="0">
-                <a:solidFill>
-                  <a:srgbClr val="FFFFFF"/>
+              <a:rPr sz="1100" b="0" i="0">
+                <a:solidFill>
+                  <a:srgbClr val="0B2D5B"/>
                 </a:solidFill>
                 <a:latin typeface="Segoe UI"/>
               </a:rPr>
@@ -8731,9 +8923,9 @@
           <a:p>
             <a:pPr algn="ctr"/>
             <a:r>
-              <a:rPr sz="1100" b="0">
-                <a:solidFill>
-                  <a:srgbClr val="FFFFFF"/>
+              <a:rPr sz="1100" b="0" i="0">
+                <a:solidFill>
+                  <a:srgbClr val="0B2D5B"/>
                 </a:solidFill>
                 <a:latin typeface="Segoe UI"/>
               </a:rPr>
@@ -8743,9 +8935,9 @@
           <a:p>
             <a:pPr algn="ctr"/>
             <a:r>
-              <a:rPr sz="1100" b="0">
-                <a:solidFill>
-                  <a:srgbClr val="FFFFFF"/>
+              <a:rPr sz="1100" b="0" i="0">
+                <a:solidFill>
+                  <a:srgbClr val="0B2D5B"/>
                 </a:solidFill>
                 <a:latin typeface="Segoe UI"/>
               </a:rPr>
@@ -8755,9 +8947,9 @@
           <a:p>
             <a:pPr algn="ctr"/>
             <a:r>
-              <a:rPr sz="1100" b="0">
-                <a:solidFill>
-                  <a:srgbClr val="FFFFFF"/>
+              <a:rPr sz="1100" b="0" i="0">
+                <a:solidFill>
+                  <a:srgbClr val="0B2D5B"/>
                 </a:solidFill>
                 <a:latin typeface="Segoe UI"/>
               </a:rPr>
@@ -8767,9 +8959,9 @@
           <a:p>
             <a:pPr algn="ctr"/>
             <a:r>
-              <a:rPr sz="1100" b="0">
-                <a:solidFill>
-                  <a:srgbClr val="FFFFFF"/>
+              <a:rPr sz="1100" b="0" i="0">
+                <a:solidFill>
+                  <a:srgbClr val="0B2D5B"/>
                 </a:solidFill>
                 <a:latin typeface="Segoe UI"/>
               </a:rPr>
@@ -8790,10 +8982,12 @@
             <a:ext cx="2240280" cy="3108960"/>
           </a:xfrm>
           <a:prstGeom prst="roundRect">
-            <a:avLst/>
+            <a:avLst>
+              <a:gd name="adj" fmla="val 10000"/>
+            </a:avLst>
           </a:prstGeom>
           <a:solidFill>
-            <a:srgbClr val="0B2D5B"/>
+            <a:srgbClr val="EAF1F9"/>
           </a:solidFill>
           <a:ln>
             <a:noFill/>
@@ -8819,9 +9013,9 @@
           <a:p>
             <a:pPr algn="ctr"/>
             <a:r>
-              <a:rPr sz="1100" b="0">
-                <a:solidFill>
-                  <a:srgbClr val="FFFFFF"/>
+              <a:rPr sz="1100" b="0" i="0">
+                <a:solidFill>
+                  <a:srgbClr val="0B2D5B"/>
                 </a:solidFill>
                 <a:latin typeface="Segoe UI"/>
               </a:rPr>
@@ -8831,9 +9025,9 @@
           <a:p>
             <a:pPr algn="ctr"/>
             <a:r>
-              <a:rPr sz="1100" b="0">
-                <a:solidFill>
-                  <a:srgbClr val="FFFFFF"/>
+              <a:rPr sz="1100" b="0" i="0">
+                <a:solidFill>
+                  <a:srgbClr val="0B2D5B"/>
                 </a:solidFill>
                 <a:latin typeface="Segoe UI"/>
               </a:rPr>
@@ -8843,9 +9037,9 @@
           <a:p>
             <a:pPr algn="ctr"/>
             <a:r>
-              <a:rPr sz="1100" b="0">
-                <a:solidFill>
-                  <a:srgbClr val="FFFFFF"/>
+              <a:rPr sz="1100" b="0" i="0">
+                <a:solidFill>
+                  <a:srgbClr val="0B2D5B"/>
                 </a:solidFill>
                 <a:latin typeface="Segoe UI"/>
               </a:rPr>
@@ -8855,9 +9049,9 @@
           <a:p>
             <a:pPr algn="ctr"/>
             <a:r>
-              <a:rPr sz="1100" b="0">
-                <a:solidFill>
-                  <a:srgbClr val="FFFFFF"/>
+              <a:rPr sz="1100" b="0" i="0">
+                <a:solidFill>
+                  <a:srgbClr val="0B2D5B"/>
                 </a:solidFill>
                 <a:latin typeface="Segoe UI"/>
               </a:rPr>
@@ -8867,9 +9061,9 @@
           <a:p>
             <a:pPr algn="ctr"/>
             <a:r>
-              <a:rPr sz="1100" b="0">
-                <a:solidFill>
-                  <a:srgbClr val="FFFFFF"/>
+              <a:rPr sz="1100" b="0" i="0">
+                <a:solidFill>
+                  <a:srgbClr val="0B2D5B"/>
                 </a:solidFill>
                 <a:latin typeface="Segoe UI"/>
               </a:rPr>
@@ -8886,14 +9080,16 @@
         </p:nvSpPr>
         <p:spPr>
           <a:xfrm>
-            <a:off x="457200" y="5623560"/>
-            <a:ext cx="11247120" cy="685800"/>
+            <a:off x="457200" y="5596128"/>
+            <a:ext cx="11247120" cy="713232"/>
           </a:xfrm>
           <a:prstGeom prst="roundRect">
-            <a:avLst/>
+            <a:avLst>
+              <a:gd name="adj" fmla="val 10000"/>
+            </a:avLst>
           </a:prstGeom>
           <a:solidFill>
-            <a:srgbClr val="F7941D"/>
+            <a:srgbClr val="EAF1F9"/>
           </a:solidFill>
           <a:ln>
             <a:noFill/>
@@ -8919,9 +9115,9 @@
           <a:p>
             <a:pPr algn="ctr"/>
             <a:r>
-              <a:rPr sz="1700" b="1">
-                <a:solidFill>
-                  <a:srgbClr val="FFFFFF"/>
+              <a:rPr sz="1700" b="1" i="1">
+                <a:solidFill>
+                  <a:srgbClr val="0B2D5B"/>
                 </a:solidFill>
                 <a:latin typeface="Segoe UI"/>
               </a:rPr>
@@ -8938,8 +9134,8 @@
         </p:nvSpPr>
         <p:spPr>
           <a:xfrm>
-            <a:off x="457200" y="6400800"/>
-            <a:ext cx="11247120" cy="411480"/>
+            <a:off x="457200" y="6355080"/>
+            <a:ext cx="11247120" cy="457200"/>
           </a:xfrm>
           <a:prstGeom prst="rect">
             <a:avLst/>
@@ -8954,7 +9150,7 @@
           <a:p>
             <a:pPr algn="l"/>
             <a:r>
-              <a:rPr sz="800" b="0">
+              <a:rPr sz="700" b="0" i="0">
                 <a:solidFill>
                   <a:srgbClr val="8A8A8A"/>
                 </a:solidFill>
@@ -8976,6 +9172,14 @@
 <file path=ppt/slides/slide18.xml><?xml version="1.0" encoding="utf-8"?>
 <p:sld xmlns:a="http://schemas.openxmlformats.org/drawingml/2006/main" xmlns:p="http://schemas.openxmlformats.org/presentationml/2006/main" xmlns:r="http://schemas.openxmlformats.org/officeDocument/2006/relationships">
   <p:cSld>
+    <p:bg>
+      <p:bgPr>
+        <a:solidFill>
+          <a:srgbClr val="0B2D5B"/>
+        </a:solidFill>
+        <a:effectLst/>
+      </p:bgPr>
+    </p:bg>
     <p:spTree>
       <p:nvGrpSpPr>
         <p:cNvPr id="1" name=""/>
@@ -8992,7 +9196,7 @@
         <p:spPr>
           <a:xfrm>
             <a:off x="457200" y="228600"/>
-            <a:ext cx="11247120" cy="914400"/>
+            <a:ext cx="11247120" cy="1051560"/>
           </a:xfrm>
           <a:prstGeom prst="rect">
             <a:avLst/>
@@ -9007,9 +9211,9 @@
           <a:p>
             <a:pPr algn="l"/>
             <a:r>
-              <a:rPr sz="2800" b="1">
-                <a:solidFill>
-                  <a:srgbClr val="0B2D5B"/>
+              <a:rPr sz="2800" b="1" i="0">
+                <a:solidFill>
+                  <a:srgbClr val="FFFFFF"/>
                 </a:solidFill>
                 <a:latin typeface="Segoe UI"/>
               </a:rPr>
@@ -9030,10 +9234,12 @@
             <a:ext cx="6949440" cy="868680"/>
           </a:xfrm>
           <a:prstGeom prst="roundRect">
-            <a:avLst/>
+            <a:avLst>
+              <a:gd name="adj" fmla="val 10000"/>
+            </a:avLst>
           </a:prstGeom>
           <a:solidFill>
-            <a:srgbClr val="0B2D5B"/>
+            <a:srgbClr val="EAF1F9"/>
           </a:solidFill>
           <a:ln>
             <a:noFill/>
@@ -9059,9 +9265,9 @@
           <a:p>
             <a:pPr algn="ctr"/>
             <a:r>
-              <a:rPr sz="1100" b="0">
-                <a:solidFill>
-                  <a:srgbClr val="FFFFFF"/>
+              <a:rPr sz="1100" b="1" i="0">
+                <a:solidFill>
+                  <a:srgbClr val="0B2D5B"/>
                 </a:solidFill>
                 <a:latin typeface="Segoe UI"/>
               </a:rPr>
@@ -9082,10 +9288,12 @@
             <a:ext cx="6949440" cy="868680"/>
           </a:xfrm>
           <a:prstGeom prst="roundRect">
-            <a:avLst/>
+            <a:avLst>
+              <a:gd name="adj" fmla="val 10000"/>
+            </a:avLst>
           </a:prstGeom>
           <a:solidFill>
-            <a:srgbClr val="0B2D5B"/>
+            <a:srgbClr val="EAF1F9"/>
           </a:solidFill>
           <a:ln>
             <a:noFill/>
@@ -9111,9 +9319,9 @@
           <a:p>
             <a:pPr algn="ctr"/>
             <a:r>
-              <a:rPr sz="1100" b="0">
-                <a:solidFill>
-                  <a:srgbClr val="FFFFFF"/>
+              <a:rPr sz="1100" b="1" i="0">
+                <a:solidFill>
+                  <a:srgbClr val="0B2D5B"/>
                 </a:solidFill>
                 <a:latin typeface="Segoe UI"/>
               </a:rPr>
@@ -9134,10 +9342,12 @@
             <a:ext cx="6949440" cy="868680"/>
           </a:xfrm>
           <a:prstGeom prst="roundRect">
-            <a:avLst/>
+            <a:avLst>
+              <a:gd name="adj" fmla="val 10000"/>
+            </a:avLst>
           </a:prstGeom>
           <a:solidFill>
-            <a:srgbClr val="0B2D5B"/>
+            <a:srgbClr val="EAF1F9"/>
           </a:solidFill>
           <a:ln>
             <a:noFill/>
@@ -9163,9 +9373,9 @@
           <a:p>
             <a:pPr algn="ctr"/>
             <a:r>
-              <a:rPr sz="1100" b="0">
-                <a:solidFill>
-                  <a:srgbClr val="FFFFFF"/>
+              <a:rPr sz="1100" b="1" i="0">
+                <a:solidFill>
+                  <a:srgbClr val="0B2D5B"/>
                 </a:solidFill>
                 <a:latin typeface="Segoe UI"/>
               </a:rPr>
@@ -9215,7 +9425,7 @@
           <a:p>
             <a:pPr algn="ctr"/>
             <a:r>
-              <a:rPr sz="1100" b="0">
+              <a:rPr sz="1100" b="0" i="0">
                 <a:solidFill>
                   <a:srgbClr val="8A8A8A"/>
                 </a:solidFill>
@@ -9229,65 +9439,13 @@
       <p:sp>
         <p:nvSpPr>
           <p:cNvPr id="7" name="killer"/>
-          <p:cNvSpPr/>
-          <p:nvPr/>
-        </p:nvSpPr>
-        <p:spPr>
-          <a:xfrm>
-            <a:off x="457200" y="5623560"/>
+          <p:cNvSpPr txBox="1"/>
+          <p:nvPr/>
+        </p:nvSpPr>
+        <p:spPr>
+          <a:xfrm>
+            <a:off x="457200" y="5577840"/>
             <a:ext cx="11247120" cy="685800"/>
-          </a:xfrm>
-          <a:prstGeom prst="roundRect">
-            <a:avLst/>
-          </a:prstGeom>
-          <a:solidFill>
-            <a:srgbClr val="F7941D"/>
-          </a:solidFill>
-          <a:ln>
-            <a:noFill/>
-          </a:ln>
-        </p:spPr>
-        <p:style>
-          <a:lnRef idx="1">
-            <a:schemeClr val="accent1"/>
-          </a:lnRef>
-          <a:fillRef idx="3">
-            <a:schemeClr val="accent1"/>
-          </a:fillRef>
-          <a:effectRef idx="2">
-            <a:schemeClr val="accent1"/>
-          </a:effectRef>
-          <a:fontRef idx="minor">
-            <a:schemeClr val="lt1"/>
-          </a:fontRef>
-        </p:style>
-        <p:txBody>
-          <a:bodyPr rtlCol="0" anchor="ctr" wrap="square"/>
-          <a:lstStyle/>
-          <a:p>
-            <a:pPr algn="ctr"/>
-            <a:r>
-              <a:rPr sz="1700" b="1">
-                <a:solidFill>
-                  <a:srgbClr val="FFFFFF"/>
-                </a:solidFill>
-                <a:latin typeface="Segoe UI"/>
-              </a:rPr>
-              <a:t>Không phải thêm một chatbot — mà là một đội ngũ chuyên gia số có thể kiểm chứng, cho nghiệp vụ cốt lõi nhất của ngân hàng.</a:t>
-            </a:r>
-          </a:p>
-        </p:txBody>
-      </p:sp>
-      <p:sp>
-        <p:nvSpPr>
-          <p:cNvPr id="8" name="footer"/>
-          <p:cNvSpPr txBox="1"/>
-          <p:nvPr/>
-        </p:nvSpPr>
-        <p:spPr>
-          <a:xfrm>
-            <a:off x="457200" y="6400800"/>
-            <a:ext cx="11247120" cy="411480"/>
           </a:xfrm>
           <a:prstGeom prst="rect">
             <a:avLst/>
@@ -9302,9 +9460,44 @@
           <a:p>
             <a:pPr algn="l"/>
             <a:r>
-              <a:rPr sz="800" b="0">
-                <a:solidFill>
-                  <a:srgbClr val="8A8A8A"/>
+              <a:rPr sz="1700" b="1" i="1">
+                <a:solidFill>
+                  <a:srgbClr val="FFFFFF"/>
+                </a:solidFill>
+                <a:latin typeface="Segoe UI"/>
+              </a:rPr>
+              <a:t>Không phải thêm một chatbot — mà là một đội ngũ chuyên gia số có thể kiểm chứng, cho nghiệp vụ cốt lõi nhất của ngân hàng.</a:t>
+            </a:r>
+          </a:p>
+        </p:txBody>
+      </p:sp>
+      <p:sp>
+        <p:nvSpPr>
+          <p:cNvPr id="8" name="footer"/>
+          <p:cNvSpPr txBox="1"/>
+          <p:nvPr/>
+        </p:nvSpPr>
+        <p:spPr>
+          <a:xfrm>
+            <a:off x="457200" y="6355080"/>
+            <a:ext cx="11247120" cy="457200"/>
+          </a:xfrm>
+          <a:prstGeom prst="rect">
+            <a:avLst/>
+          </a:prstGeom>
+          <a:noFill/>
+        </p:spPr>
+        <p:txBody>
+          <a:bodyPr wrap="square">
+            <a:spAutoFit/>
+          </a:bodyPr>
+          <a:lstStyle/>
+          <a:p>
+            <a:pPr algn="l"/>
+            <a:r>
+              <a:rPr sz="700" b="0" i="0">
+                <a:solidFill>
+                  <a:srgbClr val="CADCFC"/>
                 </a:solidFill>
                 <a:latin typeface="Segoe UI"/>
               </a:rPr>
@@ -9340,7 +9533,7 @@
         <p:spPr>
           <a:xfrm>
             <a:off x="457200" y="228600"/>
-            <a:ext cx="11247120" cy="914400"/>
+            <a:ext cx="11247120" cy="1051560"/>
           </a:xfrm>
           <a:prstGeom prst="rect">
             <a:avLst/>
@@ -9355,7 +9548,7 @@
           <a:p>
             <a:pPr algn="l"/>
             <a:r>
-              <a:rPr sz="2800" b="1">
+              <a:rPr sz="2800" b="1" i="0">
                 <a:solidFill>
                   <a:srgbClr val="0B2D5B"/>
                 </a:solidFill>
@@ -9388,11 +9581,18 @@
           </a:bodyPr>
           <a:lstStyle/>
           <a:p>
-            <a:pPr algn="l"/>
-            <a:r>
-              <a:rPr sz="1400" b="0">
-                <a:solidFill>
-                  <a:srgbClr val="1A1A1A"/>
+            <a:pPr algn="l">
+              <a:lnSpc>
+                <a:spcPct val="112000"/>
+              </a:lnSpc>
+              <a:spcAft>
+                <a:spcPts val="500"/>
+              </a:spcAft>
+            </a:pPr>
+            <a:r>
+              <a:rPr sz="1400" b="0" i="0">
+                <a:solidFill>
+                  <a:srgbClr val="445063"/>
                 </a:solidFill>
                 <a:latin typeface="Segoe UI"/>
               </a:rPr>
@@ -9400,11 +9600,18 @@
             </a:r>
           </a:p>
           <a:p>
-            <a:pPr algn="l"/>
-            <a:r>
-              <a:rPr sz="1400" b="0">
-                <a:solidFill>
-                  <a:srgbClr val="1A1A1A"/>
+            <a:pPr algn="l">
+              <a:lnSpc>
+                <a:spcPct val="112000"/>
+              </a:lnSpc>
+              <a:spcAft>
+                <a:spcPts val="500"/>
+              </a:spcAft>
+            </a:pPr>
+            <a:r>
+              <a:rPr sz="1400" b="0" i="0">
+                <a:solidFill>
+                  <a:srgbClr val="445063"/>
                 </a:solidFill>
                 <a:latin typeface="Segoe UI"/>
               </a:rPr>
@@ -9412,11 +9619,18 @@
             </a:r>
           </a:p>
           <a:p>
-            <a:pPr algn="l"/>
-            <a:r>
-              <a:rPr sz="1400" b="0">
-                <a:solidFill>
-                  <a:srgbClr val="1A1A1A"/>
+            <a:pPr algn="l">
+              <a:lnSpc>
+                <a:spcPct val="112000"/>
+              </a:lnSpc>
+              <a:spcAft>
+                <a:spcPts val="500"/>
+              </a:spcAft>
+            </a:pPr>
+            <a:r>
+              <a:rPr sz="1400" b="0" i="0">
+                <a:solidFill>
+                  <a:srgbClr val="445063"/>
                 </a:solidFill>
                 <a:latin typeface="Segoe UI"/>
               </a:rPr>
@@ -9424,11 +9638,18 @@
             </a:r>
           </a:p>
           <a:p>
-            <a:pPr algn="l"/>
-            <a:r>
-              <a:rPr sz="1400" b="0">
-                <a:solidFill>
-                  <a:srgbClr val="1A1A1A"/>
+            <a:pPr algn="l">
+              <a:lnSpc>
+                <a:spcPct val="112000"/>
+              </a:lnSpc>
+              <a:spcAft>
+                <a:spcPts val="500"/>
+              </a:spcAft>
+            </a:pPr>
+            <a:r>
+              <a:rPr sz="1400" b="0" i="0">
+                <a:solidFill>
+                  <a:srgbClr val="445063"/>
                 </a:solidFill>
                 <a:latin typeface="Segoe UI"/>
               </a:rPr>
@@ -9436,11 +9657,18 @@
             </a:r>
           </a:p>
           <a:p>
-            <a:pPr algn="l"/>
-            <a:r>
-              <a:rPr sz="1400" b="0">
-                <a:solidFill>
-                  <a:srgbClr val="1A1A1A"/>
+            <a:pPr algn="l">
+              <a:lnSpc>
+                <a:spcPct val="112000"/>
+              </a:lnSpc>
+              <a:spcAft>
+                <a:spcPts val="500"/>
+              </a:spcAft>
+            </a:pPr>
+            <a:r>
+              <a:rPr sz="1400" b="0" i="0">
+                <a:solidFill>
+                  <a:srgbClr val="445063"/>
                 </a:solidFill>
                 <a:latin typeface="Segoe UI"/>
               </a:rPr>
@@ -9448,11 +9676,18 @@
             </a:r>
           </a:p>
           <a:p>
-            <a:pPr algn="l"/>
-            <a:r>
-              <a:rPr sz="1400" b="0">
-                <a:solidFill>
-                  <a:srgbClr val="1A1A1A"/>
+            <a:pPr algn="l">
+              <a:lnSpc>
+                <a:spcPct val="112000"/>
+              </a:lnSpc>
+              <a:spcAft>
+                <a:spcPts val="500"/>
+              </a:spcAft>
+            </a:pPr>
+            <a:r>
+              <a:rPr sz="1400" b="0" i="0">
+                <a:solidFill>
+                  <a:srgbClr val="445063"/>
                 </a:solidFill>
                 <a:latin typeface="Segoe UI"/>
               </a:rPr>
@@ -9469,14 +9704,16 @@
         </p:nvSpPr>
         <p:spPr>
           <a:xfrm>
-            <a:off x="457200" y="5623560"/>
-            <a:ext cx="11247120" cy="685800"/>
+            <a:off x="457200" y="5596128"/>
+            <a:ext cx="11247120" cy="713232"/>
           </a:xfrm>
           <a:prstGeom prst="roundRect">
-            <a:avLst/>
+            <a:avLst>
+              <a:gd name="adj" fmla="val 10000"/>
+            </a:avLst>
           </a:prstGeom>
           <a:solidFill>
-            <a:srgbClr val="F7941D"/>
+            <a:srgbClr val="EAF1F9"/>
           </a:solidFill>
           <a:ln>
             <a:noFill/>
@@ -9502,9 +9739,9 @@
           <a:p>
             <a:pPr algn="ctr"/>
             <a:r>
-              <a:rPr sz="1700" b="1">
-                <a:solidFill>
-                  <a:srgbClr val="FFFFFF"/>
+              <a:rPr sz="1700" b="1" i="1">
+                <a:solidFill>
+                  <a:srgbClr val="0B2D5B"/>
                 </a:solidFill>
                 <a:latin typeface="Segoe UI"/>
               </a:rPr>
@@ -9521,8 +9758,8 @@
         </p:nvSpPr>
         <p:spPr>
           <a:xfrm>
-            <a:off x="457200" y="6400800"/>
-            <a:ext cx="11247120" cy="411480"/>
+            <a:off x="457200" y="6355080"/>
+            <a:ext cx="11247120" cy="457200"/>
           </a:xfrm>
           <a:prstGeom prst="rect">
             <a:avLst/>
@@ -9537,7 +9774,7 @@
           <a:p>
             <a:pPr algn="l"/>
             <a:r>
-              <a:rPr sz="800" b="0">
+              <a:rPr sz="700" b="0" i="0">
                 <a:solidFill>
                   <a:srgbClr val="8A8A8A"/>
                 </a:solidFill>
@@ -9575,7 +9812,7 @@
         <p:spPr>
           <a:xfrm>
             <a:off x="457200" y="228600"/>
-            <a:ext cx="11247120" cy="914400"/>
+            <a:ext cx="11247120" cy="1051560"/>
           </a:xfrm>
           <a:prstGeom prst="rect">
             <a:avLst/>
@@ -9590,7 +9827,7 @@
           <a:p>
             <a:pPr algn="l"/>
             <a:r>
-              <a:rPr sz="2800" b="1">
+              <a:rPr sz="2800" b="1" i="0">
                 <a:solidFill>
                   <a:srgbClr val="0B2D5B"/>
                 </a:solidFill>
@@ -9613,7 +9850,63 @@
             <a:ext cx="2651760" cy="914400"/>
           </a:xfrm>
           <a:prstGeom prst="roundRect">
-            <a:avLst/>
+            <a:avLst>
+              <a:gd name="adj" fmla="val 10000"/>
+            </a:avLst>
+          </a:prstGeom>
+          <a:solidFill>
+            <a:srgbClr val="1F4E8C"/>
+          </a:solidFill>
+          <a:ln>
+            <a:noFill/>
+          </a:ln>
+        </p:spPr>
+        <p:style>
+          <a:lnRef idx="1">
+            <a:schemeClr val="accent1"/>
+          </a:lnRef>
+          <a:fillRef idx="3">
+            <a:schemeClr val="accent1"/>
+          </a:fillRef>
+          <a:effectRef idx="2">
+            <a:schemeClr val="accent1"/>
+          </a:effectRef>
+          <a:fontRef idx="minor">
+            <a:schemeClr val="lt1"/>
+          </a:fontRef>
+        </p:style>
+        <p:txBody>
+          <a:bodyPr rtlCol="0" anchor="ctr" wrap="square"/>
+          <a:lstStyle/>
+          <a:p>
+            <a:pPr algn="ctr"/>
+            <a:r>
+              <a:rPr sz="1100" b="1" i="0">
+                <a:solidFill>
+                  <a:srgbClr val="FFFFFF"/>
+                </a:solidFill>
+                <a:latin typeface="Segoe UI"/>
+              </a:rPr>
+              <a:t>Chatbot Q&amp;A</a:t>
+            </a:r>
+          </a:p>
+        </p:txBody>
+      </p:sp>
+      <p:sp>
+        <p:nvSpPr>
+          <p:cNvPr id="4" name="stage_box"/>
+          <p:cNvSpPr/>
+          <p:nvPr/>
+        </p:nvSpPr>
+        <p:spPr>
+          <a:xfrm>
+            <a:off x="3657600" y="3657600"/>
+            <a:ext cx="2651760" cy="1463040"/>
+          </a:xfrm>
+          <a:prstGeom prst="roundRect">
+            <a:avLst>
+              <a:gd name="adj" fmla="val 10000"/>
+            </a:avLst>
           </a:prstGeom>
           <a:solidFill>
             <a:srgbClr val="0B2D5B"/>
@@ -9642,33 +9935,35 @@
           <a:p>
             <a:pPr algn="ctr"/>
             <a:r>
-              <a:rPr sz="1100" b="1">
+              <a:rPr sz="1100" b="1" i="0">
                 <a:solidFill>
                   <a:srgbClr val="FFFFFF"/>
                 </a:solidFill>
                 <a:latin typeface="Segoe UI"/>
               </a:rPr>
-              <a:t>Chatbot Q&amp;A</a:t>
-            </a:r>
-          </a:p>
-        </p:txBody>
-      </p:sp>
-      <p:sp>
-        <p:nvSpPr>
-          <p:cNvPr id="4" name="stage_box"/>
+              <a:t>RAG trả lời có nguồn</a:t>
+            </a:r>
+          </a:p>
+        </p:txBody>
+      </p:sp>
+      <p:sp>
+        <p:nvSpPr>
+          <p:cNvPr id="5" name="stage_box"/>
           <p:cNvSpPr/>
           <p:nvPr/>
         </p:nvSpPr>
         <p:spPr>
           <a:xfrm>
-            <a:off x="3657600" y="3657600"/>
-            <a:ext cx="2651760" cy="1463040"/>
+            <a:off x="8778240" y="3108960"/>
+            <a:ext cx="2651760" cy="2011680"/>
           </a:xfrm>
           <a:prstGeom prst="roundRect">
-            <a:avLst/>
+            <a:avLst>
+              <a:gd name="adj" fmla="val 10000"/>
+            </a:avLst>
           </a:prstGeom>
           <a:solidFill>
-            <a:srgbClr val="0B2D5B"/>
+            <a:srgbClr val="F7941D"/>
           </a:solidFill>
           <a:ln>
             <a:noFill/>
@@ -9694,61 +9989,9 @@
           <a:p>
             <a:pPr algn="ctr"/>
             <a:r>
-              <a:rPr sz="1100" b="1">
-                <a:solidFill>
-                  <a:srgbClr val="FFFFFF"/>
-                </a:solidFill>
-                <a:latin typeface="Segoe UI"/>
-              </a:rPr>
-              <a:t>RAG trả lời có nguồn</a:t>
-            </a:r>
-          </a:p>
-        </p:txBody>
-      </p:sp>
-      <p:sp>
-        <p:nvSpPr>
-          <p:cNvPr id="5" name="stage_box"/>
-          <p:cNvSpPr/>
-          <p:nvPr/>
-        </p:nvSpPr>
-        <p:spPr>
-          <a:xfrm>
-            <a:off x="8778240" y="3108960"/>
-            <a:ext cx="2651760" cy="2011680"/>
-          </a:xfrm>
-          <a:prstGeom prst="roundRect">
-            <a:avLst/>
-          </a:prstGeom>
-          <a:solidFill>
-            <a:srgbClr val="0B2D5B"/>
-          </a:solidFill>
-          <a:ln>
-            <a:noFill/>
-          </a:ln>
-        </p:spPr>
-        <p:style>
-          <a:lnRef idx="1">
-            <a:schemeClr val="accent1"/>
-          </a:lnRef>
-          <a:fillRef idx="3">
-            <a:schemeClr val="accent1"/>
-          </a:fillRef>
-          <a:effectRef idx="2">
-            <a:schemeClr val="accent1"/>
-          </a:effectRef>
-          <a:fontRef idx="minor">
-            <a:schemeClr val="lt1"/>
-          </a:fontRef>
-        </p:style>
-        <p:txBody>
-          <a:bodyPr rtlCol="0" anchor="ctr" wrap="square"/>
-          <a:lstStyle/>
-          <a:p>
-            <a:pPr algn="ctr"/>
-            <a:r>
-              <a:rPr sz="1100" b="1">
-                <a:solidFill>
-                  <a:srgbClr val="FFFFFF"/>
+              <a:rPr sz="1100" b="1" i="0">
+                <a:solidFill>
+                  <a:srgbClr val="0B2D5B"/>
                 </a:solidFill>
                 <a:latin typeface="Segoe UI"/>
               </a:rPr>
@@ -9769,7 +10012,9 @@
             <a:ext cx="2103120" cy="1097280"/>
           </a:xfrm>
           <a:prstGeom prst="roundRect">
-            <a:avLst/>
+            <a:avLst>
+              <a:gd name="adj" fmla="val 10000"/>
+            </a:avLst>
           </a:prstGeom>
           <a:solidFill>
             <a:srgbClr val="C0392B"/>
@@ -9798,7 +10043,7 @@
           <a:p>
             <a:pPr algn="ctr"/>
             <a:r>
-              <a:rPr sz="1100" b="1">
+              <a:rPr sz="1100" b="1" i="0">
                 <a:solidFill>
                   <a:srgbClr val="FFFFFF"/>
                 </a:solidFill>
@@ -9831,11 +10076,18 @@
           </a:bodyPr>
           <a:lstStyle/>
           <a:p>
-            <a:pPr algn="l"/>
-            <a:r>
-              <a:rPr sz="1100" b="0">
-                <a:solidFill>
-                  <a:srgbClr val="1A1A1A"/>
+            <a:pPr algn="l">
+              <a:lnSpc>
+                <a:spcPct val="112000"/>
+              </a:lnSpc>
+              <a:spcAft>
+                <a:spcPts val="500"/>
+              </a:spcAft>
+            </a:pPr>
+            <a:r>
+              <a:rPr sz="1100" b="0" i="0">
+                <a:solidFill>
+                  <a:srgbClr val="445063"/>
                 </a:solidFill>
                 <a:latin typeface="Segoe UI"/>
               </a:rPr>
@@ -9843,11 +10095,18 @@
             </a:r>
           </a:p>
           <a:p>
-            <a:pPr algn="l"/>
-            <a:r>
-              <a:rPr sz="1100" b="0">
-                <a:solidFill>
-                  <a:srgbClr val="1A1A1A"/>
+            <a:pPr algn="l">
+              <a:lnSpc>
+                <a:spcPct val="112000"/>
+              </a:lnSpc>
+              <a:spcAft>
+                <a:spcPts val="500"/>
+              </a:spcAft>
+            </a:pPr>
+            <a:r>
+              <a:rPr sz="1100" b="0" i="0">
+                <a:solidFill>
+                  <a:srgbClr val="445063"/>
                 </a:solidFill>
                 <a:latin typeface="Segoe UI"/>
               </a:rPr>
@@ -9855,11 +10114,18 @@
             </a:r>
           </a:p>
           <a:p>
-            <a:pPr algn="l"/>
-            <a:r>
-              <a:rPr sz="1100" b="0">
-                <a:solidFill>
-                  <a:srgbClr val="1A1A1A"/>
+            <a:pPr algn="l">
+              <a:lnSpc>
+                <a:spcPct val="112000"/>
+              </a:lnSpc>
+              <a:spcAft>
+                <a:spcPts val="500"/>
+              </a:spcAft>
+            </a:pPr>
+            <a:r>
+              <a:rPr sz="1100" b="0" i="0">
+                <a:solidFill>
+                  <a:srgbClr val="445063"/>
                 </a:solidFill>
                 <a:latin typeface="Segoe UI"/>
               </a:rPr>
@@ -9876,14 +10142,16 @@
         </p:nvSpPr>
         <p:spPr>
           <a:xfrm>
-            <a:off x="457200" y="5623560"/>
-            <a:ext cx="11247120" cy="685800"/>
+            <a:off x="457200" y="5596128"/>
+            <a:ext cx="11247120" cy="713232"/>
           </a:xfrm>
           <a:prstGeom prst="roundRect">
-            <a:avLst/>
+            <a:avLst>
+              <a:gd name="adj" fmla="val 10000"/>
+            </a:avLst>
           </a:prstGeom>
           <a:solidFill>
-            <a:srgbClr val="F7941D"/>
+            <a:srgbClr val="EAF1F9"/>
           </a:solidFill>
           <a:ln>
             <a:noFill/>
@@ -9909,9 +10177,9 @@
           <a:p>
             <a:pPr algn="ctr"/>
             <a:r>
-              <a:rPr sz="1700" b="1">
-                <a:solidFill>
-                  <a:srgbClr val="FFFFFF"/>
+              <a:rPr sz="1700" b="1" i="1">
+                <a:solidFill>
+                  <a:srgbClr val="0B2D5B"/>
                 </a:solidFill>
                 <a:latin typeface="Segoe UI"/>
               </a:rPr>
@@ -9928,8 +10196,8 @@
         </p:nvSpPr>
         <p:spPr>
           <a:xfrm>
-            <a:off x="457200" y="6400800"/>
-            <a:ext cx="11247120" cy="411480"/>
+            <a:off x="457200" y="6355080"/>
+            <a:ext cx="11247120" cy="457200"/>
           </a:xfrm>
           <a:prstGeom prst="rect">
             <a:avLst/>
@@ -9944,7 +10212,7 @@
           <a:p>
             <a:pPr algn="l"/>
             <a:r>
-              <a:rPr sz="800" b="0">
+              <a:rPr sz="700" b="0" i="0">
                 <a:solidFill>
                   <a:srgbClr val="8A8A8A"/>
                 </a:solidFill>
@@ -9982,7 +10250,7 @@
         <p:spPr>
           <a:xfrm>
             <a:off x="457200" y="228600"/>
-            <a:ext cx="11247120" cy="914400"/>
+            <a:ext cx="11247120" cy="1051560"/>
           </a:xfrm>
           <a:prstGeom prst="rect">
             <a:avLst/>
@@ -9997,7 +10265,7 @@
           <a:p>
             <a:pPr algn="l"/>
             <a:r>
-              <a:rPr sz="2800" b="1">
+              <a:rPr sz="2800" b="1" i="0">
                 <a:solidFill>
                   <a:srgbClr val="0B2D5B"/>
                 </a:solidFill>
@@ -10016,8 +10284,8 @@
         </p:nvSpPr>
         <p:spPr>
           <a:xfrm>
-            <a:off x="457200" y="1051560"/>
-            <a:ext cx="11247120" cy="548640"/>
+            <a:off x="457200" y="1325880"/>
+            <a:ext cx="11247120" cy="658368"/>
           </a:xfrm>
           <a:prstGeom prst="rect">
             <a:avLst/>
@@ -10032,9 +10300,9 @@
           <a:p>
             <a:pPr algn="l"/>
             <a:r>
-              <a:rPr sz="1700" b="1">
-                <a:solidFill>
-                  <a:srgbClr val="1A1A1A"/>
+              <a:rPr sz="1700" b="0" i="1">
+                <a:solidFill>
+                  <a:srgbClr val="445063"/>
                 </a:solidFill>
                 <a:latin typeface="Segoe UI"/>
               </a:rPr>
@@ -10051,11 +10319,13 @@
         </p:nvSpPr>
         <p:spPr>
           <a:xfrm>
-            <a:off x="4023360" y="2834640"/>
-            <a:ext cx="2743200" cy="1188720"/>
+            <a:off x="4023360" y="3017520"/>
+            <a:ext cx="2743200" cy="1051560"/>
           </a:xfrm>
           <a:prstGeom prst="roundRect">
-            <a:avLst/>
+            <a:avLst>
+              <a:gd name="adj" fmla="val 10000"/>
+            </a:avLst>
           </a:prstGeom>
           <a:solidFill>
             <a:srgbClr val="F7941D"/>
@@ -10084,9 +10354,9 @@
           <a:p>
             <a:pPr algn="ctr"/>
             <a:r>
-              <a:rPr sz="1100" b="1">
-                <a:solidFill>
-                  <a:srgbClr val="FFFFFF"/>
+              <a:rPr sz="1100" b="1" i="0">
+                <a:solidFill>
+                  <a:srgbClr val="0B2D5B"/>
                 </a:solidFill>
                 <a:latin typeface="Segoe UI"/>
               </a:rPr>
@@ -10096,9 +10366,9 @@
           <a:p>
             <a:pPr algn="ctr"/>
             <a:r>
-              <a:rPr sz="1100" b="1">
-                <a:solidFill>
-                  <a:srgbClr val="FFFFFF"/>
+              <a:rPr sz="1100" b="1" i="0">
+                <a:solidFill>
+                  <a:srgbClr val="0B2D5B"/>
                 </a:solidFill>
                 <a:latin typeface="Segoe UI"/>
               </a:rPr>
@@ -10115,11 +10385,13 @@
         </p:nvSpPr>
         <p:spPr>
           <a:xfrm>
-            <a:off x="914400" y="1828800"/>
+            <a:off x="914400" y="2103120"/>
             <a:ext cx="2743200" cy="777240"/>
           </a:xfrm>
           <a:prstGeom prst="roundRect">
-            <a:avLst/>
+            <a:avLst>
+              <a:gd name="adj" fmla="val 10000"/>
+            </a:avLst>
           </a:prstGeom>
           <a:solidFill>
             <a:srgbClr val="0B2D5B"/>
@@ -10148,7 +10420,7 @@
           <a:p>
             <a:pPr algn="ctr"/>
             <a:r>
-              <a:rPr sz="1100" b="0">
+              <a:rPr sz="1100" b="0" i="0">
                 <a:solidFill>
                   <a:srgbClr val="FFFFFF"/>
                 </a:solidFill>
@@ -10167,11 +10439,13 @@
         </p:nvSpPr>
         <p:spPr>
           <a:xfrm>
-            <a:off x="4023360" y="1691640"/>
+            <a:off x="4023360" y="2103120"/>
             <a:ext cx="2743200" cy="777240"/>
           </a:xfrm>
           <a:prstGeom prst="roundRect">
-            <a:avLst/>
+            <a:avLst>
+              <a:gd name="adj" fmla="val 10000"/>
+            </a:avLst>
           </a:prstGeom>
           <a:solidFill>
             <a:srgbClr val="0B2D5B"/>
@@ -10200,7 +10474,7 @@
           <a:p>
             <a:pPr algn="ctr"/>
             <a:r>
-              <a:rPr sz="1100" b="0">
+              <a:rPr sz="1100" b="0" i="0">
                 <a:solidFill>
                   <a:srgbClr val="FFFFFF"/>
                 </a:solidFill>
@@ -10219,11 +10493,13 @@
         </p:nvSpPr>
         <p:spPr>
           <a:xfrm>
-            <a:off x="7132320" y="1828800"/>
+            <a:off x="7132320" y="2103120"/>
             <a:ext cx="2743200" cy="777240"/>
           </a:xfrm>
           <a:prstGeom prst="roundRect">
-            <a:avLst/>
+            <a:avLst>
+              <a:gd name="adj" fmla="val 10000"/>
+            </a:avLst>
           </a:prstGeom>
           <a:solidFill>
             <a:srgbClr val="0B2D5B"/>
@@ -10252,7 +10528,7 @@
           <a:p>
             <a:pPr algn="ctr"/>
             <a:r>
-              <a:rPr sz="1100" b="0">
+              <a:rPr sz="1100" b="0" i="0">
                 <a:solidFill>
                   <a:srgbClr val="FFFFFF"/>
                 </a:solidFill>
@@ -10275,7 +10551,9 @@
             <a:ext cx="2743200" cy="777240"/>
           </a:xfrm>
           <a:prstGeom prst="roundRect">
-            <a:avLst/>
+            <a:avLst>
+              <a:gd name="adj" fmla="val 10000"/>
+            </a:avLst>
           </a:prstGeom>
           <a:solidFill>
             <a:srgbClr val="0B2D5B"/>
@@ -10304,7 +10582,7 @@
           <a:p>
             <a:pPr algn="ctr"/>
             <a:r>
-              <a:rPr sz="1100" b="0">
+              <a:rPr sz="1100" b="0" i="0">
                 <a:solidFill>
                   <a:srgbClr val="FFFFFF"/>
                 </a:solidFill>
@@ -10323,11 +10601,13 @@
         </p:nvSpPr>
         <p:spPr>
           <a:xfrm>
-            <a:off x="4023360" y="4343400"/>
+            <a:off x="4023360" y="4206240"/>
             <a:ext cx="2743200" cy="777240"/>
           </a:xfrm>
           <a:prstGeom prst="roundRect">
-            <a:avLst/>
+            <a:avLst>
+              <a:gd name="adj" fmla="val 10000"/>
+            </a:avLst>
           </a:prstGeom>
           <a:solidFill>
             <a:srgbClr val="0B2D5B"/>
@@ -10356,7 +10636,7 @@
           <a:p>
             <a:pPr algn="ctr"/>
             <a:r>
-              <a:rPr sz="1100" b="0">
+              <a:rPr sz="1100" b="0" i="0">
                 <a:solidFill>
                   <a:srgbClr val="FFFFFF"/>
                 </a:solidFill>
@@ -10379,7 +10659,9 @@
             <a:ext cx="2743200" cy="777240"/>
           </a:xfrm>
           <a:prstGeom prst="roundRect">
-            <a:avLst/>
+            <a:avLst>
+              <a:gd name="adj" fmla="val 10000"/>
+            </a:avLst>
           </a:prstGeom>
           <a:solidFill>
             <a:srgbClr val="0B2D5B"/>
@@ -10408,7 +10690,7 @@
           <a:p>
             <a:pPr algn="ctr"/>
             <a:r>
-              <a:rPr sz="1100" b="0">
+              <a:rPr sz="1100" b="0" i="0">
                 <a:solidFill>
                   <a:srgbClr val="FFFFFF"/>
                 </a:solidFill>
@@ -10427,8 +10709,8 @@
         </p:nvSpPr>
         <p:spPr>
           <a:xfrm>
-            <a:off x="10058400" y="1737360"/>
-            <a:ext cx="1828800" cy="3291840"/>
+            <a:off x="10058400" y="2103120"/>
+            <a:ext cx="1828800" cy="2880360"/>
           </a:xfrm>
           <a:prstGeom prst="rect">
             <a:avLst/>
@@ -10460,7 +10742,7 @@
           <a:p>
             <a:pPr algn="ctr"/>
             <a:r>
-              <a:rPr sz="1100" b="0">
+              <a:rPr sz="1100" b="0" i="0">
                 <a:solidFill>
                   <a:srgbClr val="8A8A8A"/>
                 </a:solidFill>
@@ -10483,10 +10765,12 @@
             <a:ext cx="3657600" cy="685800"/>
           </a:xfrm>
           <a:prstGeom prst="roundRect">
-            <a:avLst/>
+            <a:avLst>
+              <a:gd name="adj" fmla="val 10000"/>
+            </a:avLst>
           </a:prstGeom>
           <a:solidFill>
-            <a:srgbClr val="0B2D5B"/>
+            <a:srgbClr val="EAF1F9"/>
           </a:solidFill>
           <a:ln>
             <a:noFill/>
@@ -10512,9 +10796,9 @@
           <a:p>
             <a:pPr algn="ctr"/>
             <a:r>
-              <a:rPr sz="1100" b="1">
-                <a:solidFill>
-                  <a:srgbClr val="FFFFFF"/>
+              <a:rPr sz="1100" b="1" i="0">
+                <a:solidFill>
+                  <a:srgbClr val="0B2D5B"/>
                 </a:solidFill>
                 <a:latin typeface="Segoe UI"/>
               </a:rPr>
@@ -10535,10 +10819,12 @@
             <a:ext cx="3657600" cy="685800"/>
           </a:xfrm>
           <a:prstGeom prst="roundRect">
-            <a:avLst/>
+            <a:avLst>
+              <a:gd name="adj" fmla="val 10000"/>
+            </a:avLst>
           </a:prstGeom>
           <a:solidFill>
-            <a:srgbClr val="0B2D5B"/>
+            <a:srgbClr val="EAF1F9"/>
           </a:solidFill>
           <a:ln>
             <a:noFill/>
@@ -10564,9 +10850,9 @@
           <a:p>
             <a:pPr algn="ctr"/>
             <a:r>
-              <a:rPr sz="1100" b="1">
-                <a:solidFill>
-                  <a:srgbClr val="FFFFFF"/>
+              <a:rPr sz="1100" b="1" i="0">
+                <a:solidFill>
+                  <a:srgbClr val="0B2D5B"/>
                 </a:solidFill>
                 <a:latin typeface="Segoe UI"/>
               </a:rPr>
@@ -10587,10 +10873,12 @@
             <a:ext cx="3657600" cy="685800"/>
           </a:xfrm>
           <a:prstGeom prst="roundRect">
-            <a:avLst/>
+            <a:avLst>
+              <a:gd name="adj" fmla="val 10000"/>
+            </a:avLst>
           </a:prstGeom>
           <a:solidFill>
-            <a:srgbClr val="0B2D5B"/>
+            <a:srgbClr val="EAF1F9"/>
           </a:solidFill>
           <a:ln>
             <a:noFill/>
@@ -10616,9 +10904,9 @@
           <a:p>
             <a:pPr algn="ctr"/>
             <a:r>
-              <a:rPr sz="1100" b="1">
-                <a:solidFill>
-                  <a:srgbClr val="FFFFFF"/>
+              <a:rPr sz="1100" b="1" i="0">
+                <a:solidFill>
+                  <a:srgbClr val="0B2D5B"/>
                 </a:solidFill>
                 <a:latin typeface="Segoe UI"/>
               </a:rPr>
@@ -10635,8 +10923,8 @@
         </p:nvSpPr>
         <p:spPr>
           <a:xfrm>
-            <a:off x="457200" y="6400800"/>
-            <a:ext cx="11247120" cy="411480"/>
+            <a:off x="457200" y="6355080"/>
+            <a:ext cx="11247120" cy="457200"/>
           </a:xfrm>
           <a:prstGeom prst="rect">
             <a:avLst/>
@@ -10651,7 +10939,7 @@
           <a:p>
             <a:pPr algn="l"/>
             <a:r>
-              <a:rPr sz="800" b="0">
+              <a:rPr sz="700" b="0" i="0">
                 <a:solidFill>
                   <a:srgbClr val="8A8A8A"/>
                 </a:solidFill>
@@ -10663,7 +10951,7 @@
           <a:p>
             <a:pPr algn="l"/>
             <a:r>
-              <a:rPr sz="800" b="0">
+              <a:rPr sz="700" b="0" i="0">
                 <a:solidFill>
                   <a:srgbClr val="8A8A8A"/>
                 </a:solidFill>
@@ -10701,7 +10989,7 @@
         <p:spPr>
           <a:xfrm>
             <a:off x="457200" y="228600"/>
-            <a:ext cx="11247120" cy="914400"/>
+            <a:ext cx="11247120" cy="1051560"/>
           </a:xfrm>
           <a:prstGeom prst="rect">
             <a:avLst/>
@@ -10716,7 +11004,7 @@
           <a:p>
             <a:pPr algn="l"/>
             <a:r>
-              <a:rPr sz="2800" b="1">
+              <a:rPr sz="2800" b="1" i="0">
                 <a:solidFill>
                   <a:srgbClr val="0B2D5B"/>
                 </a:solidFill>
@@ -10739,10 +11027,12 @@
             <a:ext cx="5486400" cy="457200"/>
           </a:xfrm>
           <a:prstGeom prst="roundRect">
-            <a:avLst/>
+            <a:avLst>
+              <a:gd name="adj" fmla="val 10000"/>
+            </a:avLst>
           </a:prstGeom>
           <a:solidFill>
-            <a:srgbClr val="8A8A8A"/>
+            <a:srgbClr val="445063"/>
           </a:solidFill>
           <a:ln>
             <a:noFill/>
@@ -10768,7 +11058,7 @@
           <a:p>
             <a:pPr algn="ctr"/>
             <a:r>
-              <a:rPr sz="1100" b="1">
+              <a:rPr sz="1100" b="1" i="0">
                 <a:solidFill>
                   <a:srgbClr val="FFFFFF"/>
                 </a:solidFill>
@@ -10791,7 +11081,9 @@
             <a:ext cx="5486400" cy="457200"/>
           </a:xfrm>
           <a:prstGeom prst="roundRect">
-            <a:avLst/>
+            <a:avLst>
+              <a:gd name="adj" fmla="val 10000"/>
+            </a:avLst>
           </a:prstGeom>
           <a:solidFill>
             <a:srgbClr val="F7941D"/>
@@ -10820,9 +11112,9 @@
           <a:p>
             <a:pPr algn="ctr"/>
             <a:r>
-              <a:rPr sz="1100" b="1">
-                <a:solidFill>
-                  <a:srgbClr val="FFFFFF"/>
+              <a:rPr sz="1100" b="1" i="0">
+                <a:solidFill>
+                  <a:srgbClr val="0B2D5B"/>
                 </a:solidFill>
                 <a:latin typeface="Segoe UI"/>
               </a:rPr>
@@ -10853,11 +11145,18 @@
           </a:bodyPr>
           <a:lstStyle/>
           <a:p>
-            <a:pPr algn="l"/>
-            <a:r>
-              <a:rPr sz="1100" b="0">
-                <a:solidFill>
-                  <a:srgbClr val="1A1A1A"/>
+            <a:pPr algn="l">
+              <a:lnSpc>
+                <a:spcPct val="112000"/>
+              </a:lnSpc>
+              <a:spcAft>
+                <a:spcPts val="500"/>
+              </a:spcAft>
+            </a:pPr>
+            <a:r>
+              <a:rPr sz="1100" b="0" i="0">
+                <a:solidFill>
+                  <a:srgbClr val="445063"/>
                 </a:solidFill>
                 <a:latin typeface="Segoe UI"/>
               </a:rPr>
@@ -10865,11 +11164,18 @@
             </a:r>
           </a:p>
           <a:p>
-            <a:pPr algn="l"/>
-            <a:r>
-              <a:rPr sz="1100" b="0">
-                <a:solidFill>
-                  <a:srgbClr val="1A1A1A"/>
+            <a:pPr algn="l">
+              <a:lnSpc>
+                <a:spcPct val="112000"/>
+              </a:lnSpc>
+              <a:spcAft>
+                <a:spcPts val="500"/>
+              </a:spcAft>
+            </a:pPr>
+            <a:r>
+              <a:rPr sz="1100" b="0" i="0">
+                <a:solidFill>
+                  <a:srgbClr val="445063"/>
                 </a:solidFill>
                 <a:latin typeface="Segoe UI"/>
               </a:rPr>
@@ -10877,11 +11183,18 @@
             </a:r>
           </a:p>
           <a:p>
-            <a:pPr algn="l"/>
-            <a:r>
-              <a:rPr sz="1100" b="0">
-                <a:solidFill>
-                  <a:srgbClr val="1A1A1A"/>
+            <a:pPr algn="l">
+              <a:lnSpc>
+                <a:spcPct val="112000"/>
+              </a:lnSpc>
+              <a:spcAft>
+                <a:spcPts val="500"/>
+              </a:spcAft>
+            </a:pPr>
+            <a:r>
+              <a:rPr sz="1100" b="0" i="0">
+                <a:solidFill>
+                  <a:srgbClr val="445063"/>
                 </a:solidFill>
                 <a:latin typeface="Segoe UI"/>
               </a:rPr>
@@ -10889,11 +11202,18 @@
             </a:r>
           </a:p>
           <a:p>
-            <a:pPr algn="l"/>
-            <a:r>
-              <a:rPr sz="1100" b="0">
-                <a:solidFill>
-                  <a:srgbClr val="1A1A1A"/>
+            <a:pPr algn="l">
+              <a:lnSpc>
+                <a:spcPct val="112000"/>
+              </a:lnSpc>
+              <a:spcAft>
+                <a:spcPts val="500"/>
+              </a:spcAft>
+            </a:pPr>
+            <a:r>
+              <a:rPr sz="1100" b="0" i="0">
+                <a:solidFill>
+                  <a:srgbClr val="445063"/>
                 </a:solidFill>
                 <a:latin typeface="Segoe UI"/>
               </a:rPr>
@@ -10901,11 +11221,18 @@
             </a:r>
           </a:p>
           <a:p>
-            <a:pPr algn="l"/>
-            <a:r>
-              <a:rPr sz="1100" b="0">
-                <a:solidFill>
-                  <a:srgbClr val="1A1A1A"/>
+            <a:pPr algn="l">
+              <a:lnSpc>
+                <a:spcPct val="112000"/>
+              </a:lnSpc>
+              <a:spcAft>
+                <a:spcPts val="500"/>
+              </a:spcAft>
+            </a:pPr>
+            <a:r>
+              <a:rPr sz="1100" b="0" i="0">
+                <a:solidFill>
+                  <a:srgbClr val="445063"/>
                 </a:solidFill>
                 <a:latin typeface="Segoe UI"/>
               </a:rPr>
@@ -10913,11 +11240,18 @@
             </a:r>
           </a:p>
           <a:p>
-            <a:pPr algn="l"/>
-            <a:r>
-              <a:rPr sz="1100" b="0">
-                <a:solidFill>
-                  <a:srgbClr val="1A1A1A"/>
+            <a:pPr algn="l">
+              <a:lnSpc>
+                <a:spcPct val="112000"/>
+              </a:lnSpc>
+              <a:spcAft>
+                <a:spcPts val="500"/>
+              </a:spcAft>
+            </a:pPr>
+            <a:r>
+              <a:rPr sz="1100" b="0" i="0">
+                <a:solidFill>
+                  <a:srgbClr val="445063"/>
                 </a:solidFill>
                 <a:latin typeface="Segoe UI"/>
               </a:rPr>
@@ -10948,9 +11282,16 @@
           </a:bodyPr>
           <a:lstStyle/>
           <a:p>
-            <a:pPr algn="l"/>
-            <a:r>
-              <a:rPr sz="1100" b="0">
+            <a:pPr algn="l">
+              <a:lnSpc>
+                <a:spcPct val="112000"/>
+              </a:lnSpc>
+              <a:spcAft>
+                <a:spcPts val="500"/>
+              </a:spcAft>
+            </a:pPr>
+            <a:r>
+              <a:rPr sz="1100" b="0" i="0">
                 <a:solidFill>
                   <a:srgbClr val="1A1A1A"/>
                 </a:solidFill>
@@ -10960,9 +11301,16 @@
             </a:r>
           </a:p>
           <a:p>
-            <a:pPr algn="l"/>
-            <a:r>
-              <a:rPr sz="1100" b="0">
+            <a:pPr algn="l">
+              <a:lnSpc>
+                <a:spcPct val="112000"/>
+              </a:lnSpc>
+              <a:spcAft>
+                <a:spcPts val="500"/>
+              </a:spcAft>
+            </a:pPr>
+            <a:r>
+              <a:rPr sz="1100" b="0" i="0">
                 <a:solidFill>
                   <a:srgbClr val="1A1A1A"/>
                 </a:solidFill>
@@ -10972,9 +11320,16 @@
             </a:r>
           </a:p>
           <a:p>
-            <a:pPr algn="l"/>
-            <a:r>
-              <a:rPr sz="1100" b="0">
+            <a:pPr algn="l">
+              <a:lnSpc>
+                <a:spcPct val="112000"/>
+              </a:lnSpc>
+              <a:spcAft>
+                <a:spcPts val="500"/>
+              </a:spcAft>
+            </a:pPr>
+            <a:r>
+              <a:rPr sz="1100" b="0" i="0">
                 <a:solidFill>
                   <a:srgbClr val="1A1A1A"/>
                 </a:solidFill>
@@ -10984,9 +11339,16 @@
             </a:r>
           </a:p>
           <a:p>
-            <a:pPr algn="l"/>
-            <a:r>
-              <a:rPr sz="1100" b="0">
+            <a:pPr algn="l">
+              <a:lnSpc>
+                <a:spcPct val="112000"/>
+              </a:lnSpc>
+              <a:spcAft>
+                <a:spcPts val="500"/>
+              </a:spcAft>
+            </a:pPr>
+            <a:r>
+              <a:rPr sz="1100" b="0" i="0">
                 <a:solidFill>
                   <a:srgbClr val="1A1A1A"/>
                 </a:solidFill>
@@ -10996,9 +11358,16 @@
             </a:r>
           </a:p>
           <a:p>
-            <a:pPr algn="l"/>
-            <a:r>
-              <a:rPr sz="1100" b="0">
+            <a:pPr algn="l">
+              <a:lnSpc>
+                <a:spcPct val="112000"/>
+              </a:lnSpc>
+              <a:spcAft>
+                <a:spcPts val="500"/>
+              </a:spcAft>
+            </a:pPr>
+            <a:r>
+              <a:rPr sz="1100" b="0" i="0">
                 <a:solidFill>
                   <a:srgbClr val="1A1A1A"/>
                 </a:solidFill>
@@ -11008,9 +11377,16 @@
             </a:r>
           </a:p>
           <a:p>
-            <a:pPr algn="l"/>
-            <a:r>
-              <a:rPr sz="1100" b="0">
+            <a:pPr algn="l">
+              <a:lnSpc>
+                <a:spcPct val="112000"/>
+              </a:lnSpc>
+              <a:spcAft>
+                <a:spcPts val="500"/>
+              </a:spcAft>
+            </a:pPr>
+            <a:r>
+              <a:rPr sz="1100" b="0" i="0">
                 <a:solidFill>
                   <a:srgbClr val="1A1A1A"/>
                 </a:solidFill>
@@ -11033,7 +11409,9 @@
             <a:ext cx="5486400" cy="457200"/>
           </a:xfrm>
           <a:prstGeom prst="roundRect">
-            <a:avLst/>
+            <a:avLst>
+              <a:gd name="adj" fmla="val 10000"/>
+            </a:avLst>
           </a:prstGeom>
           <a:solidFill>
             <a:srgbClr val="C0392B"/>
@@ -11062,7 +11440,7 @@
           <a:p>
             <a:pPr algn="ctr"/>
             <a:r>
-              <a:rPr sz="1100" b="1">
+              <a:rPr sz="1100" b="1" i="0">
                 <a:solidFill>
                   <a:srgbClr val="FFFFFF"/>
                 </a:solidFill>
@@ -11085,7 +11463,9 @@
             <a:ext cx="2194560" cy="457200"/>
           </a:xfrm>
           <a:prstGeom prst="roundRect">
-            <a:avLst/>
+            <a:avLst>
+              <a:gd name="adj" fmla="val 10000"/>
+            </a:avLst>
           </a:prstGeom>
           <a:solidFill>
             <a:srgbClr val="1E7A3C"/>
@@ -11114,7 +11494,7 @@
           <a:p>
             <a:pPr algn="ctr"/>
             <a:r>
-              <a:rPr sz="1100" b="1">
+              <a:rPr sz="1100" b="1" i="0">
                 <a:solidFill>
                   <a:srgbClr val="FFFFFF"/>
                 </a:solidFill>
@@ -11133,14 +11513,16 @@
         </p:nvSpPr>
         <p:spPr>
           <a:xfrm>
-            <a:off x="457200" y="5623560"/>
-            <a:ext cx="11247120" cy="685800"/>
+            <a:off x="457200" y="5596128"/>
+            <a:ext cx="11247120" cy="713232"/>
           </a:xfrm>
           <a:prstGeom prst="roundRect">
-            <a:avLst/>
+            <a:avLst>
+              <a:gd name="adj" fmla="val 10000"/>
+            </a:avLst>
           </a:prstGeom>
           <a:solidFill>
-            <a:srgbClr val="F7941D"/>
+            <a:srgbClr val="EAF1F9"/>
           </a:solidFill>
           <a:ln>
             <a:noFill/>
@@ -11166,9 +11548,9 @@
           <a:p>
             <a:pPr algn="ctr"/>
             <a:r>
-              <a:rPr sz="1700" b="1">
-                <a:solidFill>
-                  <a:srgbClr val="FFFFFF"/>
+              <a:rPr sz="1700" b="1" i="1">
+                <a:solidFill>
+                  <a:srgbClr val="0B2D5B"/>
                 </a:solidFill>
                 <a:latin typeface="Segoe UI"/>
               </a:rPr>
@@ -11185,8 +11567,8 @@
         </p:nvSpPr>
         <p:spPr>
           <a:xfrm>
-            <a:off x="457200" y="6400800"/>
-            <a:ext cx="11247120" cy="411480"/>
+            <a:off x="457200" y="6355080"/>
+            <a:ext cx="11247120" cy="457200"/>
           </a:xfrm>
           <a:prstGeom prst="rect">
             <a:avLst/>
@@ -11201,7 +11583,7 @@
           <a:p>
             <a:pPr algn="l"/>
             <a:r>
-              <a:rPr sz="800" b="0">
+              <a:rPr sz="700" b="0" i="0">
                 <a:solidFill>
                   <a:srgbClr val="8A8A8A"/>
                 </a:solidFill>
@@ -11213,7 +11595,7 @@
           <a:p>
             <a:pPr algn="l"/>
             <a:r>
-              <a:rPr sz="800" b="0">
+              <a:rPr sz="700" b="0" i="0">
                 <a:solidFill>
                   <a:srgbClr val="8A8A8A"/>
                 </a:solidFill>
@@ -11251,7 +11633,7 @@
         <p:spPr>
           <a:xfrm>
             <a:off x="457200" y="228600"/>
-            <a:ext cx="11247120" cy="914400"/>
+            <a:ext cx="11247120" cy="1051560"/>
           </a:xfrm>
           <a:prstGeom prst="rect">
             <a:avLst/>
@@ -11266,7 +11648,7 @@
           <a:p>
             <a:pPr algn="l"/>
             <a:r>
-              <a:rPr sz="2800" b="1">
+              <a:rPr sz="2800" b="1" i="0">
                 <a:solidFill>
                   <a:srgbClr val="0B2D5B"/>
                 </a:solidFill>
@@ -11289,10 +11671,12 @@
             <a:ext cx="3749039" cy="2103120"/>
           </a:xfrm>
           <a:prstGeom prst="roundRect">
-            <a:avLst/>
+            <a:avLst>
+              <a:gd name="adj" fmla="val 10000"/>
+            </a:avLst>
           </a:prstGeom>
           <a:solidFill>
-            <a:srgbClr val="0B2D5B"/>
+            <a:srgbClr val="EAF1F9"/>
           </a:solidFill>
           <a:ln>
             <a:noFill/>
@@ -11318,9 +11702,9 @@
           <a:p>
             <a:pPr algn="ctr"/>
             <a:r>
-              <a:rPr sz="1100" b="0">
-                <a:solidFill>
-                  <a:srgbClr val="FFFFFF"/>
+              <a:rPr sz="1100" b="0" i="0">
+                <a:solidFill>
+                  <a:srgbClr val="0B2D5B"/>
                 </a:solidFill>
                 <a:latin typeface="Segoe UI"/>
               </a:rPr>
@@ -11341,10 +11725,12 @@
             <a:ext cx="3749039" cy="2103120"/>
           </a:xfrm>
           <a:prstGeom prst="roundRect">
-            <a:avLst/>
+            <a:avLst>
+              <a:gd name="adj" fmla="val 10000"/>
+            </a:avLst>
           </a:prstGeom>
           <a:solidFill>
-            <a:srgbClr val="0B2D5B"/>
+            <a:srgbClr val="EAF1F9"/>
           </a:solidFill>
           <a:ln>
             <a:noFill/>
@@ -11370,9 +11756,9 @@
           <a:p>
             <a:pPr algn="ctr"/>
             <a:r>
-              <a:rPr sz="1100" b="0">
-                <a:solidFill>
-                  <a:srgbClr val="FFFFFF"/>
+              <a:rPr sz="1100" b="0" i="0">
+                <a:solidFill>
+                  <a:srgbClr val="0B2D5B"/>
                 </a:solidFill>
                 <a:latin typeface="Segoe UI"/>
               </a:rPr>
@@ -11393,10 +11779,12 @@
             <a:ext cx="3749039" cy="2103120"/>
           </a:xfrm>
           <a:prstGeom prst="roundRect">
-            <a:avLst/>
+            <a:avLst>
+              <a:gd name="adj" fmla="val 10000"/>
+            </a:avLst>
           </a:prstGeom>
           <a:solidFill>
-            <a:srgbClr val="0B2D5B"/>
+            <a:srgbClr val="EAF1F9"/>
           </a:solidFill>
           <a:ln>
             <a:noFill/>
@@ -11422,9 +11810,9 @@
           <a:p>
             <a:pPr algn="ctr"/>
             <a:r>
-              <a:rPr sz="1100" b="0">
-                <a:solidFill>
-                  <a:srgbClr val="FFFFFF"/>
+              <a:rPr sz="1100" b="0" i="0">
+                <a:solidFill>
+                  <a:srgbClr val="0B2D5B"/>
                 </a:solidFill>
                 <a:latin typeface="Segoe UI"/>
               </a:rPr>
@@ -11445,10 +11833,12 @@
             <a:ext cx="3749039" cy="2103120"/>
           </a:xfrm>
           <a:prstGeom prst="roundRect">
-            <a:avLst/>
+            <a:avLst>
+              <a:gd name="adj" fmla="val 10000"/>
+            </a:avLst>
           </a:prstGeom>
           <a:solidFill>
-            <a:srgbClr val="0B2D5B"/>
+            <a:srgbClr val="EAF1F9"/>
           </a:solidFill>
           <a:ln>
             <a:noFill/>
@@ -11474,9 +11864,9 @@
           <a:p>
             <a:pPr algn="ctr"/>
             <a:r>
-              <a:rPr sz="1100" b="0">
-                <a:solidFill>
-                  <a:srgbClr val="FFFFFF"/>
+              <a:rPr sz="1100" b="0" i="0">
+                <a:solidFill>
+                  <a:srgbClr val="0B2D5B"/>
                 </a:solidFill>
                 <a:latin typeface="Segoe UI"/>
               </a:rPr>
@@ -11497,10 +11887,12 @@
             <a:ext cx="3749039" cy="2103120"/>
           </a:xfrm>
           <a:prstGeom prst="roundRect">
-            <a:avLst/>
+            <a:avLst>
+              <a:gd name="adj" fmla="val 10000"/>
+            </a:avLst>
           </a:prstGeom>
           <a:solidFill>
-            <a:srgbClr val="0B2D5B"/>
+            <a:srgbClr val="EAF1F9"/>
           </a:solidFill>
           <a:ln>
             <a:noFill/>
@@ -11526,9 +11918,9 @@
           <a:p>
             <a:pPr algn="ctr"/>
             <a:r>
-              <a:rPr sz="1100" b="0">
-                <a:solidFill>
-                  <a:srgbClr val="FFFFFF"/>
+              <a:rPr sz="1100" b="0" i="0">
+                <a:solidFill>
+                  <a:srgbClr val="0B2D5B"/>
                 </a:solidFill>
                 <a:latin typeface="Segoe UI"/>
               </a:rPr>
@@ -11549,10 +11941,12 @@
             <a:ext cx="3749039" cy="2103120"/>
           </a:xfrm>
           <a:prstGeom prst="roundRect">
-            <a:avLst/>
+            <a:avLst>
+              <a:gd name="adj" fmla="val 10000"/>
+            </a:avLst>
           </a:prstGeom>
           <a:solidFill>
-            <a:srgbClr val="0B2D5B"/>
+            <a:srgbClr val="EAF1F9"/>
           </a:solidFill>
           <a:ln>
             <a:noFill/>
@@ -11578,9 +11972,9 @@
           <a:p>
             <a:pPr algn="ctr"/>
             <a:r>
-              <a:rPr sz="1100" b="0">
-                <a:solidFill>
-                  <a:srgbClr val="FFFFFF"/>
+              <a:rPr sz="1100" b="0" i="0">
+                <a:solidFill>
+                  <a:srgbClr val="0B2D5B"/>
                 </a:solidFill>
                 <a:latin typeface="Segoe UI"/>
               </a:rPr>
@@ -11630,7 +12024,7 @@
           <a:p>
             <a:pPr algn="ctr"/>
             <a:r>
-              <a:rPr sz="1100" b="0">
+              <a:rPr sz="1100" b="0" i="0">
                 <a:solidFill>
                   <a:srgbClr val="8A8A8A"/>
                 </a:solidFill>
@@ -11649,8 +12043,8 @@
         </p:nvSpPr>
         <p:spPr>
           <a:xfrm>
-            <a:off x="457200" y="6400800"/>
-            <a:ext cx="11247120" cy="411480"/>
+            <a:off x="457200" y="6355080"/>
+            <a:ext cx="11247120" cy="457200"/>
           </a:xfrm>
           <a:prstGeom prst="rect">
             <a:avLst/>
@@ -11665,7 +12059,7 @@
           <a:p>
             <a:pPr algn="l"/>
             <a:r>
-              <a:rPr sz="800" b="0">
+              <a:rPr sz="700" b="0" i="0">
                 <a:solidFill>
                   <a:srgbClr val="8A8A8A"/>
                 </a:solidFill>
@@ -11677,7 +12071,7 @@
           <a:p>
             <a:pPr algn="l"/>
             <a:r>
-              <a:rPr sz="800" b="0">
+              <a:rPr sz="700" b="0" i="0">
                 <a:solidFill>
                   <a:srgbClr val="8A8A8A"/>
                 </a:solidFill>
@@ -11715,7 +12109,7 @@
         <p:spPr>
           <a:xfrm>
             <a:off x="457200" y="228600"/>
-            <a:ext cx="11247120" cy="914400"/>
+            <a:ext cx="11247120" cy="1051560"/>
           </a:xfrm>
           <a:prstGeom prst="rect">
             <a:avLst/>
@@ -11730,7 +12124,7 @@
           <a:p>
             <a:pPr algn="l"/>
             <a:r>
-              <a:rPr sz="2800" b="1">
+              <a:rPr sz="2800" b="1" i="0">
                 <a:solidFill>
                   <a:srgbClr val="0B2D5B"/>
                 </a:solidFill>
@@ -11782,7 +12176,7 @@
           <a:p>
             <a:pPr algn="ctr"/>
             <a:r>
-              <a:rPr sz="1100" b="0">
+              <a:rPr sz="1100" b="0" i="0">
                 <a:solidFill>
                   <a:srgbClr val="FFFFFF"/>
                 </a:solidFill>
@@ -11834,7 +12228,7 @@
           <a:p>
             <a:pPr algn="ctr"/>
             <a:r>
-              <a:rPr sz="1100" b="0">
+              <a:rPr sz="1100" b="0" i="0">
                 <a:solidFill>
                   <a:srgbClr val="FFFFFF"/>
                 </a:solidFill>
@@ -11886,7 +12280,7 @@
           <a:p>
             <a:pPr algn="ctr"/>
             <a:r>
-              <a:rPr sz="1100" b="0">
+              <a:rPr sz="1100" b="0" i="0">
                 <a:solidFill>
                   <a:srgbClr val="FFFFFF"/>
                 </a:solidFill>
@@ -11938,7 +12332,7 @@
           <a:p>
             <a:pPr algn="ctr"/>
             <a:r>
-              <a:rPr sz="1100" b="0">
+              <a:rPr sz="1100" b="0" i="0">
                 <a:solidFill>
                   <a:srgbClr val="FFFFFF"/>
                 </a:solidFill>
@@ -11990,9 +12384,9 @@
           <a:p>
             <a:pPr algn="ctr"/>
             <a:r>
-              <a:rPr sz="1100" b="0">
-                <a:solidFill>
-                  <a:srgbClr val="FFFFFF"/>
+              <a:rPr sz="1100" b="0" i="0">
+                <a:solidFill>
+                  <a:srgbClr val="0B2D5B"/>
                 </a:solidFill>
                 <a:latin typeface="Segoe UI"/>
               </a:rPr>
@@ -12042,9 +12436,9 @@
           <a:p>
             <a:pPr algn="ctr"/>
             <a:r>
-              <a:rPr sz="1100" b="0">
-                <a:solidFill>
-                  <a:srgbClr val="FFFFFF"/>
+              <a:rPr sz="1100" b="0" i="0">
+                <a:solidFill>
+                  <a:srgbClr val="0B2D5B"/>
                 </a:solidFill>
                 <a:latin typeface="Segoe UI"/>
               </a:rPr>
@@ -12094,9 +12488,9 @@
           <a:p>
             <a:pPr algn="ctr"/>
             <a:r>
-              <a:rPr sz="1100" b="0">
-                <a:solidFill>
-                  <a:srgbClr val="FFFFFF"/>
+              <a:rPr sz="1100" b="0" i="0">
+                <a:solidFill>
+                  <a:srgbClr val="0B2D5B"/>
                 </a:solidFill>
                 <a:latin typeface="Segoe UI"/>
               </a:rPr>
@@ -12146,9 +12540,9 @@
           <a:p>
             <a:pPr algn="ctr"/>
             <a:r>
-              <a:rPr sz="1100" b="0">
-                <a:solidFill>
-                  <a:srgbClr val="FFFFFF"/>
+              <a:rPr sz="1100" b="0" i="0">
+                <a:solidFill>
+                  <a:srgbClr val="0B2D5B"/>
                 </a:solidFill>
                 <a:latin typeface="Segoe UI"/>
               </a:rPr>
@@ -12165,14 +12559,16 @@
         </p:nvSpPr>
         <p:spPr>
           <a:xfrm>
-            <a:off x="457200" y="5623560"/>
-            <a:ext cx="11247120" cy="685800"/>
+            <a:off x="457200" y="5596128"/>
+            <a:ext cx="11247120" cy="713232"/>
           </a:xfrm>
           <a:prstGeom prst="roundRect">
-            <a:avLst/>
+            <a:avLst>
+              <a:gd name="adj" fmla="val 10000"/>
+            </a:avLst>
           </a:prstGeom>
           <a:solidFill>
-            <a:srgbClr val="F7941D"/>
+            <a:srgbClr val="EAF1F9"/>
           </a:solidFill>
           <a:ln>
             <a:noFill/>
@@ -12198,9 +12594,9 @@
           <a:p>
             <a:pPr algn="ctr"/>
             <a:r>
-              <a:rPr sz="1700" b="1">
-                <a:solidFill>
-                  <a:srgbClr val="FFFFFF"/>
+              <a:rPr sz="1700" b="1" i="1">
+                <a:solidFill>
+                  <a:srgbClr val="0B2D5B"/>
                 </a:solidFill>
                 <a:latin typeface="Segoe UI"/>
               </a:rPr>
@@ -12217,8 +12613,8 @@
         </p:nvSpPr>
         <p:spPr>
           <a:xfrm>
-            <a:off x="457200" y="6400800"/>
-            <a:ext cx="11247120" cy="411480"/>
+            <a:off x="457200" y="6355080"/>
+            <a:ext cx="11247120" cy="457200"/>
           </a:xfrm>
           <a:prstGeom prst="rect">
             <a:avLst/>
@@ -12233,7 +12629,7 @@
           <a:p>
             <a:pPr algn="l"/>
             <a:r>
-              <a:rPr sz="800" b="0">
+              <a:rPr sz="700" b="0" i="0">
                 <a:solidFill>
                   <a:srgbClr val="8A8A8A"/>
                 </a:solidFill>
@@ -12271,7 +12667,7 @@
         <p:spPr>
           <a:xfrm>
             <a:off x="457200" y="228600"/>
-            <a:ext cx="11247120" cy="914400"/>
+            <a:ext cx="11247120" cy="1051560"/>
           </a:xfrm>
           <a:prstGeom prst="rect">
             <a:avLst/>
@@ -12286,7 +12682,7 @@
           <a:p>
             <a:pPr algn="l"/>
             <a:r>
-              <a:rPr sz="2800" b="1">
+              <a:rPr sz="2800" b="1" i="0">
                 <a:solidFill>
                   <a:srgbClr val="0B2D5B"/>
                 </a:solidFill>
@@ -12309,7 +12705,9 @@
             <a:ext cx="5120640" cy="548640"/>
           </a:xfrm>
           <a:prstGeom prst="roundRect">
-            <a:avLst/>
+            <a:avLst>
+              <a:gd name="adj" fmla="val 10000"/>
+            </a:avLst>
           </a:prstGeom>
           <a:solidFill>
             <a:srgbClr val="0B2D5B"/>
@@ -12338,7 +12736,7 @@
           <a:p>
             <a:pPr algn="ctr"/>
             <a:r>
-              <a:rPr sz="1100" b="0">
+              <a:rPr sz="1100" b="0" i="0">
                 <a:solidFill>
                   <a:srgbClr val="FFFFFF"/>
                 </a:solidFill>
@@ -12361,7 +12759,63 @@
             <a:ext cx="5120640" cy="548640"/>
           </a:xfrm>
           <a:prstGeom prst="roundRect">
-            <a:avLst/>
+            <a:avLst>
+              <a:gd name="adj" fmla="val 10000"/>
+            </a:avLst>
+          </a:prstGeom>
+          <a:solidFill>
+            <a:srgbClr val="1F4E8C"/>
+          </a:solidFill>
+          <a:ln>
+            <a:noFill/>
+          </a:ln>
+        </p:spPr>
+        <p:style>
+          <a:lnRef idx="1">
+            <a:schemeClr val="accent1"/>
+          </a:lnRef>
+          <a:fillRef idx="3">
+            <a:schemeClr val="accent1"/>
+          </a:fillRef>
+          <a:effectRef idx="2">
+            <a:schemeClr val="accent1"/>
+          </a:effectRef>
+          <a:fontRef idx="minor">
+            <a:schemeClr val="lt1"/>
+          </a:fontRef>
+        </p:style>
+        <p:txBody>
+          <a:bodyPr rtlCol="0" anchor="ctr" wrap="square"/>
+          <a:lstStyle/>
+          <a:p>
+            <a:pPr algn="ctr"/>
+            <a:r>
+              <a:rPr sz="1100" b="0" i="0">
+                <a:solidFill>
+                  <a:srgbClr val="FFFFFF"/>
+                </a:solidFill>
+                <a:latin typeface="Segoe UI"/>
+              </a:rPr>
+              <a:t>Trang / vùng</a:t>
+            </a:r>
+          </a:p>
+        </p:txBody>
+      </p:sp>
+      <p:sp>
+        <p:nvSpPr>
+          <p:cNvPr id="5" name="chain_box"/>
+          <p:cNvSpPr/>
+          <p:nvPr/>
+        </p:nvSpPr>
+        <p:spPr>
+          <a:xfrm>
+            <a:off x="548640" y="2551176"/>
+            <a:ext cx="5120640" cy="548640"/>
+          </a:xfrm>
+          <a:prstGeom prst="roundRect">
+            <a:avLst>
+              <a:gd name="adj" fmla="val 10000"/>
+            </a:avLst>
           </a:prstGeom>
           <a:solidFill>
             <a:srgbClr val="0B2D5B"/>
@@ -12390,30 +12844,86 @@
           <a:p>
             <a:pPr algn="ctr"/>
             <a:r>
-              <a:rPr sz="1100" b="0">
+              <a:rPr sz="1100" b="0" i="0">
                 <a:solidFill>
                   <a:srgbClr val="FFFFFF"/>
                 </a:solidFill>
                 <a:latin typeface="Segoe UI"/>
               </a:rPr>
-              <a:t>Trang / vùng</a:t>
-            </a:r>
-          </a:p>
-        </p:txBody>
-      </p:sp>
-      <p:sp>
-        <p:nvSpPr>
-          <p:cNvPr id="5" name="chain_box"/>
+              <a:t>Dữ kiện trích xuất</a:t>
+            </a:r>
+          </a:p>
+        </p:txBody>
+      </p:sp>
+      <p:sp>
+        <p:nvSpPr>
+          <p:cNvPr id="6" name="chain_box"/>
           <p:cNvSpPr/>
           <p:nvPr/>
         </p:nvSpPr>
         <p:spPr>
           <a:xfrm>
-            <a:off x="548640" y="2551176"/>
+            <a:off x="548640" y="3209544"/>
             <a:ext cx="5120640" cy="548640"/>
           </a:xfrm>
           <a:prstGeom prst="roundRect">
-            <a:avLst/>
+            <a:avLst>
+              <a:gd name="adj" fmla="val 10000"/>
+            </a:avLst>
+          </a:prstGeom>
+          <a:solidFill>
+            <a:srgbClr val="1F4E8C"/>
+          </a:solidFill>
+          <a:ln>
+            <a:noFill/>
+          </a:ln>
+        </p:spPr>
+        <p:style>
+          <a:lnRef idx="1">
+            <a:schemeClr val="accent1"/>
+          </a:lnRef>
+          <a:fillRef idx="3">
+            <a:schemeClr val="accent1"/>
+          </a:fillRef>
+          <a:effectRef idx="2">
+            <a:schemeClr val="accent1"/>
+          </a:effectRef>
+          <a:fontRef idx="minor">
+            <a:schemeClr val="lt1"/>
+          </a:fontRef>
+        </p:style>
+        <p:txBody>
+          <a:bodyPr rtlCol="0" anchor="ctr" wrap="square"/>
+          <a:lstStyle/>
+          <a:p>
+            <a:pPr algn="ctr"/>
+            <a:r>
+              <a:rPr sz="1100" b="0" i="0">
+                <a:solidFill>
+                  <a:srgbClr val="FFFFFF"/>
+                </a:solidFill>
+                <a:latin typeface="Segoe UI"/>
+              </a:rPr>
+              <a:t>Tính toán xác định / trích dẫn chính sách</a:t>
+            </a:r>
+          </a:p>
+        </p:txBody>
+      </p:sp>
+      <p:sp>
+        <p:nvSpPr>
+          <p:cNvPr id="7" name="chain_box"/>
+          <p:cNvSpPr/>
+          <p:nvPr/>
+        </p:nvSpPr>
+        <p:spPr>
+          <a:xfrm>
+            <a:off x="548640" y="3867912"/>
+            <a:ext cx="5120640" cy="548640"/>
+          </a:xfrm>
+          <a:prstGeom prst="roundRect">
+            <a:avLst>
+              <a:gd name="adj" fmla="val 10000"/>
+            </a:avLst>
           </a:prstGeom>
           <a:solidFill>
             <a:srgbClr val="0B2D5B"/>
@@ -12442,33 +12952,35 @@
           <a:p>
             <a:pPr algn="ctr"/>
             <a:r>
-              <a:rPr sz="1100" b="0">
+              <a:rPr sz="1100" b="0" i="0">
                 <a:solidFill>
                   <a:srgbClr val="FFFFFF"/>
                 </a:solidFill>
                 <a:latin typeface="Segoe UI"/>
               </a:rPr>
-              <a:t>Dữ kiện trích xuất</a:t>
-            </a:r>
-          </a:p>
-        </p:txBody>
-      </p:sp>
-      <p:sp>
-        <p:nvSpPr>
-          <p:cNvPr id="6" name="chain_box"/>
+              <a:t>Nhận định (finding)</a:t>
+            </a:r>
+          </a:p>
+        </p:txBody>
+      </p:sp>
+      <p:sp>
+        <p:nvSpPr>
+          <p:cNvPr id="8" name="chain_box"/>
           <p:cNvSpPr/>
           <p:nvPr/>
         </p:nvSpPr>
         <p:spPr>
           <a:xfrm>
-            <a:off x="548640" y="3209544"/>
+            <a:off x="548640" y="4526280"/>
             <a:ext cx="5120640" cy="548640"/>
           </a:xfrm>
           <a:prstGeom prst="roundRect">
-            <a:avLst/>
+            <a:avLst>
+              <a:gd name="adj" fmla="val 10000"/>
+            </a:avLst>
           </a:prstGeom>
           <a:solidFill>
-            <a:srgbClr val="0B2D5B"/>
+            <a:srgbClr val="1F4E8C"/>
           </a:solidFill>
           <a:ln>
             <a:noFill/>
@@ -12494,33 +13006,35 @@
           <a:p>
             <a:pPr algn="ctr"/>
             <a:r>
-              <a:rPr sz="1100" b="0">
+              <a:rPr sz="1100" b="0" i="0">
                 <a:solidFill>
                   <a:srgbClr val="FFFFFF"/>
                 </a:solidFill>
                 <a:latin typeface="Segoe UI"/>
               </a:rPr>
-              <a:t>Tính toán xác định / trích dẫn chính sách</a:t>
-            </a:r>
-          </a:p>
-        </p:txBody>
-      </p:sp>
-      <p:sp>
-        <p:nvSpPr>
-          <p:cNvPr id="7" name="chain_box"/>
+              <a:t>Phản biện độc lập</a:t>
+            </a:r>
+          </a:p>
+        </p:txBody>
+      </p:sp>
+      <p:sp>
+        <p:nvSpPr>
+          <p:cNvPr id="9" name="chain_box"/>
           <p:cNvSpPr/>
           <p:nvPr/>
         </p:nvSpPr>
         <p:spPr>
           <a:xfrm>
-            <a:off x="548640" y="3867912"/>
+            <a:off x="548640" y="5184648"/>
             <a:ext cx="5120640" cy="548640"/>
           </a:xfrm>
           <a:prstGeom prst="roundRect">
-            <a:avLst/>
+            <a:avLst>
+              <a:gd name="adj" fmla="val 10000"/>
+            </a:avLst>
           </a:prstGeom>
           <a:solidFill>
-            <a:srgbClr val="0B2D5B"/>
+            <a:srgbClr val="F7941D"/>
           </a:solidFill>
           <a:ln>
             <a:noFill/>
@@ -12546,113 +13060,9 @@
           <a:p>
             <a:pPr algn="ctr"/>
             <a:r>
-              <a:rPr sz="1100" b="0">
-                <a:solidFill>
-                  <a:srgbClr val="FFFFFF"/>
-                </a:solidFill>
-                <a:latin typeface="Segoe UI"/>
-              </a:rPr>
-              <a:t>Nhận định (finding)</a:t>
-            </a:r>
-          </a:p>
-        </p:txBody>
-      </p:sp>
-      <p:sp>
-        <p:nvSpPr>
-          <p:cNvPr id="8" name="chain_box"/>
-          <p:cNvSpPr/>
-          <p:nvPr/>
-        </p:nvSpPr>
-        <p:spPr>
-          <a:xfrm>
-            <a:off x="548640" y="4526280"/>
-            <a:ext cx="5120640" cy="548640"/>
-          </a:xfrm>
-          <a:prstGeom prst="roundRect">
-            <a:avLst/>
-          </a:prstGeom>
-          <a:solidFill>
-            <a:srgbClr val="0B2D5B"/>
-          </a:solidFill>
-          <a:ln>
-            <a:noFill/>
-          </a:ln>
-        </p:spPr>
-        <p:style>
-          <a:lnRef idx="1">
-            <a:schemeClr val="accent1"/>
-          </a:lnRef>
-          <a:fillRef idx="3">
-            <a:schemeClr val="accent1"/>
-          </a:fillRef>
-          <a:effectRef idx="2">
-            <a:schemeClr val="accent1"/>
-          </a:effectRef>
-          <a:fontRef idx="minor">
-            <a:schemeClr val="lt1"/>
-          </a:fontRef>
-        </p:style>
-        <p:txBody>
-          <a:bodyPr rtlCol="0" anchor="ctr" wrap="square"/>
-          <a:lstStyle/>
-          <a:p>
-            <a:pPr algn="ctr"/>
-            <a:r>
-              <a:rPr sz="1100" b="0">
-                <a:solidFill>
-                  <a:srgbClr val="FFFFFF"/>
-                </a:solidFill>
-                <a:latin typeface="Segoe UI"/>
-              </a:rPr>
-              <a:t>Phản biện độc lập</a:t>
-            </a:r>
-          </a:p>
-        </p:txBody>
-      </p:sp>
-      <p:sp>
-        <p:nvSpPr>
-          <p:cNvPr id="9" name="chain_box"/>
-          <p:cNvSpPr/>
-          <p:nvPr/>
-        </p:nvSpPr>
-        <p:spPr>
-          <a:xfrm>
-            <a:off x="548640" y="5184648"/>
-            <a:ext cx="5120640" cy="548640"/>
-          </a:xfrm>
-          <a:prstGeom prst="roundRect">
-            <a:avLst/>
-          </a:prstGeom>
-          <a:solidFill>
-            <a:srgbClr val="0B2D5B"/>
-          </a:solidFill>
-          <a:ln>
-            <a:noFill/>
-          </a:ln>
-        </p:spPr>
-        <p:style>
-          <a:lnRef idx="1">
-            <a:schemeClr val="accent1"/>
-          </a:lnRef>
-          <a:fillRef idx="3">
-            <a:schemeClr val="accent1"/>
-          </a:fillRef>
-          <a:effectRef idx="2">
-            <a:schemeClr val="accent1"/>
-          </a:effectRef>
-          <a:fontRef idx="minor">
-            <a:schemeClr val="lt1"/>
-          </a:fontRef>
-        </p:style>
-        <p:txBody>
-          <a:bodyPr rtlCol="0" anchor="ctr" wrap="square"/>
-          <a:lstStyle/>
-          <a:p>
-            <a:pPr algn="ctr"/>
-            <a:r>
-              <a:rPr sz="1100" b="0">
-                <a:solidFill>
-                  <a:srgbClr val="FFFFFF"/>
+              <a:rPr sz="1100" b="1" i="0">
+                <a:solidFill>
+                  <a:srgbClr val="0B2D5B"/>
                 </a:solidFill>
                 <a:latin typeface="Segoe UI"/>
               </a:rPr>
@@ -12685,7 +13095,7 @@
           <a:p>
             <a:pPr algn="l"/>
             <a:r>
-              <a:rPr sz="1100" b="1">
+              <a:rPr sz="1100" b="1" i="0">
                 <a:solidFill>
                   <a:srgbClr val="0B2D5B"/>
                 </a:solidFill>
@@ -12718,11 +13128,18 @@
           </a:bodyPr>
           <a:lstStyle/>
           <a:p>
-            <a:pPr algn="l"/>
-            <a:r>
-              <a:rPr sz="1100" b="0">
-                <a:solidFill>
-                  <a:srgbClr val="1A1A1A"/>
+            <a:pPr algn="l">
+              <a:lnSpc>
+                <a:spcPct val="112000"/>
+              </a:lnSpc>
+              <a:spcAft>
+                <a:spcPts val="500"/>
+              </a:spcAft>
+            </a:pPr>
+            <a:r>
+              <a:rPr sz="1100" b="0" i="0">
+                <a:solidFill>
+                  <a:srgbClr val="445063"/>
                 </a:solidFill>
                 <a:latin typeface="Segoe UI"/>
               </a:rPr>
@@ -12730,11 +13147,18 @@
             </a:r>
           </a:p>
           <a:p>
-            <a:pPr algn="l"/>
-            <a:r>
-              <a:rPr sz="1100" b="0">
-                <a:solidFill>
-                  <a:srgbClr val="1A1A1A"/>
+            <a:pPr algn="l">
+              <a:lnSpc>
+                <a:spcPct val="112000"/>
+              </a:lnSpc>
+              <a:spcAft>
+                <a:spcPts val="500"/>
+              </a:spcAft>
+            </a:pPr>
+            <a:r>
+              <a:rPr sz="1100" b="0" i="0">
+                <a:solidFill>
+                  <a:srgbClr val="445063"/>
                 </a:solidFill>
                 <a:latin typeface="Segoe UI"/>
               </a:rPr>
@@ -12742,11 +13166,18 @@
             </a:r>
           </a:p>
           <a:p>
-            <a:pPr algn="l"/>
-            <a:r>
-              <a:rPr sz="1100" b="0">
-                <a:solidFill>
-                  <a:srgbClr val="1A1A1A"/>
+            <a:pPr algn="l">
+              <a:lnSpc>
+                <a:spcPct val="112000"/>
+              </a:lnSpc>
+              <a:spcAft>
+                <a:spcPts val="500"/>
+              </a:spcAft>
+            </a:pPr>
+            <a:r>
+              <a:rPr sz="1100" b="0" i="0">
+                <a:solidFill>
+                  <a:srgbClr val="445063"/>
                 </a:solidFill>
                 <a:latin typeface="Segoe UI"/>
               </a:rPr>
@@ -12754,11 +13185,18 @@
             </a:r>
           </a:p>
           <a:p>
-            <a:pPr algn="l"/>
-            <a:r>
-              <a:rPr sz="1100" b="0">
-                <a:solidFill>
-                  <a:srgbClr val="1A1A1A"/>
+            <a:pPr algn="l">
+              <a:lnSpc>
+                <a:spcPct val="112000"/>
+              </a:lnSpc>
+              <a:spcAft>
+                <a:spcPts val="500"/>
+              </a:spcAft>
+            </a:pPr>
+            <a:r>
+              <a:rPr sz="1100" b="0" i="0">
+                <a:solidFill>
+                  <a:srgbClr val="445063"/>
                 </a:solidFill>
                 <a:latin typeface="Segoe UI"/>
               </a:rPr>
@@ -12766,11 +13204,18 @@
             </a:r>
           </a:p>
           <a:p>
-            <a:pPr algn="l"/>
-            <a:r>
-              <a:rPr sz="1100" b="0">
-                <a:solidFill>
-                  <a:srgbClr val="1A1A1A"/>
+            <a:pPr algn="l">
+              <a:lnSpc>
+                <a:spcPct val="112000"/>
+              </a:lnSpc>
+              <a:spcAft>
+                <a:spcPts val="500"/>
+              </a:spcAft>
+            </a:pPr>
+            <a:r>
+              <a:rPr sz="1100" b="0" i="0">
+                <a:solidFill>
+                  <a:srgbClr val="445063"/>
                 </a:solidFill>
                 <a:latin typeface="Segoe UI"/>
               </a:rPr>
@@ -12778,11 +13223,18 @@
             </a:r>
           </a:p>
           <a:p>
-            <a:pPr algn="l"/>
-            <a:r>
-              <a:rPr sz="1100" b="0">
-                <a:solidFill>
-                  <a:srgbClr val="1A1A1A"/>
+            <a:pPr algn="l">
+              <a:lnSpc>
+                <a:spcPct val="112000"/>
+              </a:lnSpc>
+              <a:spcAft>
+                <a:spcPts val="500"/>
+              </a:spcAft>
+            </a:pPr>
+            <a:r>
+              <a:rPr sz="1100" b="0" i="0">
+                <a:solidFill>
+                  <a:srgbClr val="445063"/>
                 </a:solidFill>
                 <a:latin typeface="Segoe UI"/>
               </a:rPr>
@@ -12790,11 +13242,18 @@
             </a:r>
           </a:p>
           <a:p>
-            <a:pPr algn="l"/>
-            <a:r>
-              <a:rPr sz="1100" b="0">
-                <a:solidFill>
-                  <a:srgbClr val="1A1A1A"/>
+            <a:pPr algn="l">
+              <a:lnSpc>
+                <a:spcPct val="112000"/>
+              </a:lnSpc>
+              <a:spcAft>
+                <a:spcPts val="500"/>
+              </a:spcAft>
+            </a:pPr>
+            <a:r>
+              <a:rPr sz="1100" b="0" i="0">
+                <a:solidFill>
+                  <a:srgbClr val="445063"/>
                 </a:solidFill>
                 <a:latin typeface="Segoe UI"/>
               </a:rPr>
@@ -12844,7 +13303,7 @@
           <a:p>
             <a:pPr algn="ctr"/>
             <a:r>
-              <a:rPr sz="1100" b="0">
+              <a:rPr sz="1100" b="0" i="0">
                 <a:solidFill>
                   <a:srgbClr val="8A8A8A"/>
                 </a:solidFill>
@@ -12863,8 +13322,8 @@
         </p:nvSpPr>
         <p:spPr>
           <a:xfrm>
-            <a:off x="457200" y="6400800"/>
-            <a:ext cx="11247120" cy="411480"/>
+            <a:off x="457200" y="6355080"/>
+            <a:ext cx="11247120" cy="457200"/>
           </a:xfrm>
           <a:prstGeom prst="rect">
             <a:avLst/>
@@ -12879,7 +13338,7 @@
           <a:p>
             <a:pPr algn="l"/>
             <a:r>
-              <a:rPr sz="800" b="0">
+              <a:rPr sz="700" b="0" i="0">
                 <a:solidFill>
                   <a:srgbClr val="8A8A8A"/>
                 </a:solidFill>
@@ -12891,7 +13350,7 @@
           <a:p>
             <a:pPr algn="l"/>
             <a:r>
-              <a:rPr sz="800" b="0">
+              <a:rPr sz="700" b="0" i="0">
                 <a:solidFill>
                   <a:srgbClr val="8A8A8A"/>
                 </a:solidFill>
@@ -12929,7 +13388,7 @@
         <p:spPr>
           <a:xfrm>
             <a:off x="457200" y="228600"/>
-            <a:ext cx="11247120" cy="914400"/>
+            <a:ext cx="11247120" cy="1051560"/>
           </a:xfrm>
           <a:prstGeom prst="rect">
             <a:avLst/>
@@ -12944,7 +13403,7 @@
           <a:p>
             <a:pPr algn="l"/>
             <a:r>
-              <a:rPr sz="2800" b="1">
+              <a:rPr sz="2800" b="1" i="0">
                 <a:solidFill>
                   <a:srgbClr val="0B2D5B"/>
                 </a:solidFill>
@@ -12967,10 +13426,12 @@
             <a:ext cx="2606040" cy="914400"/>
           </a:xfrm>
           <a:prstGeom prst="roundRect">
-            <a:avLst/>
+            <a:avLst>
+              <a:gd name="adj" fmla="val 10000"/>
+            </a:avLst>
           </a:prstGeom>
           <a:solidFill>
-            <a:srgbClr val="0B2D5B"/>
+            <a:srgbClr val="1F4E8C"/>
           </a:solidFill>
           <a:ln>
             <a:noFill/>
@@ -12996,7 +13457,7 @@
           <a:p>
             <a:pPr algn="ctr"/>
             <a:r>
-              <a:rPr sz="1100" b="0">
+              <a:rPr sz="1100" b="0" i="0">
                 <a:solidFill>
                   <a:srgbClr val="FFFFFF"/>
                 </a:solidFill>
@@ -13019,10 +13480,12 @@
             <a:ext cx="2606040" cy="914400"/>
           </a:xfrm>
           <a:prstGeom prst="roundRect">
-            <a:avLst/>
+            <a:avLst>
+              <a:gd name="adj" fmla="val 10000"/>
+            </a:avLst>
           </a:prstGeom>
           <a:solidFill>
-            <a:srgbClr val="0B2D5B"/>
+            <a:srgbClr val="1F4E8C"/>
           </a:solidFill>
           <a:ln>
             <a:noFill/>
@@ -13048,7 +13511,7 @@
           <a:p>
             <a:pPr algn="ctr"/>
             <a:r>
-              <a:rPr sz="1100" b="0">
+              <a:rPr sz="1100" b="0" i="0">
                 <a:solidFill>
                   <a:srgbClr val="FFFFFF"/>
                 </a:solidFill>
@@ -13071,10 +13534,12 @@
             <a:ext cx="2606040" cy="914400"/>
           </a:xfrm>
           <a:prstGeom prst="roundRect">
-            <a:avLst/>
+            <a:avLst>
+              <a:gd name="adj" fmla="val 10000"/>
+            </a:avLst>
           </a:prstGeom>
           <a:solidFill>
-            <a:srgbClr val="0B2D5B"/>
+            <a:srgbClr val="1F4E8C"/>
           </a:solidFill>
           <a:ln>
             <a:noFill/>
@@ -13100,7 +13565,7 @@
           <a:p>
             <a:pPr algn="ctr"/>
             <a:r>
-              <a:rPr sz="1100" b="0">
+              <a:rPr sz="1100" b="0" i="0">
                 <a:solidFill>
                   <a:srgbClr val="FFFFFF"/>
                 </a:solidFill>
@@ -13123,10 +13588,12 @@
             <a:ext cx="2606040" cy="914400"/>
           </a:xfrm>
           <a:prstGeom prst="roundRect">
-            <a:avLst/>
+            <a:avLst>
+              <a:gd name="adj" fmla="val 10000"/>
+            </a:avLst>
           </a:prstGeom>
           <a:solidFill>
-            <a:srgbClr val="0B2D5B"/>
+            <a:srgbClr val="1F4E8C"/>
           </a:solidFill>
           <a:ln>
             <a:noFill/>
@@ -13152,7 +13619,7 @@
           <a:p>
             <a:pPr algn="ctr"/>
             <a:r>
-              <a:rPr sz="1100" b="0">
+              <a:rPr sz="1100" b="0" i="0">
                 <a:solidFill>
                   <a:srgbClr val="FFFFFF"/>
                 </a:solidFill>
@@ -13175,10 +13642,12 @@
             <a:ext cx="2606040" cy="914400"/>
           </a:xfrm>
           <a:prstGeom prst="roundRect">
-            <a:avLst/>
+            <a:avLst>
+              <a:gd name="adj" fmla="val 10000"/>
+            </a:avLst>
           </a:prstGeom>
           <a:solidFill>
-            <a:srgbClr val="0B2D5B"/>
+            <a:srgbClr val="1F4E8C"/>
           </a:solidFill>
           <a:ln>
             <a:noFill/>
@@ -13204,7 +13673,7 @@
           <a:p>
             <a:pPr algn="ctr"/>
             <a:r>
-              <a:rPr sz="1100" b="0">
+              <a:rPr sz="1100" b="0" i="0">
                 <a:solidFill>
                   <a:srgbClr val="FFFFFF"/>
                 </a:solidFill>
@@ -13227,10 +13696,12 @@
             <a:ext cx="2606040" cy="914400"/>
           </a:xfrm>
           <a:prstGeom prst="roundRect">
-            <a:avLst/>
+            <a:avLst>
+              <a:gd name="adj" fmla="val 10000"/>
+            </a:avLst>
           </a:prstGeom>
           <a:solidFill>
-            <a:srgbClr val="0B2D5B"/>
+            <a:srgbClr val="1F4E8C"/>
           </a:solidFill>
           <a:ln>
             <a:noFill/>
@@ -13256,7 +13727,7 @@
           <a:p>
             <a:pPr algn="ctr"/>
             <a:r>
-              <a:rPr sz="1100" b="0">
+              <a:rPr sz="1100" b="0" i="0">
                 <a:solidFill>
                   <a:srgbClr val="FFFFFF"/>
                 </a:solidFill>
@@ -13279,7 +13750,9 @@
             <a:ext cx="2377440" cy="1463040"/>
           </a:xfrm>
           <a:prstGeom prst="roundRect">
-            <a:avLst/>
+            <a:avLst>
+              <a:gd name="adj" fmla="val 10000"/>
+            </a:avLst>
           </a:prstGeom>
           <a:solidFill>
             <a:srgbClr val="F7941D"/>
@@ -13308,9 +13781,9 @@
           <a:p>
             <a:pPr algn="ctr"/>
             <a:r>
-              <a:rPr sz="1100" b="1">
-                <a:solidFill>
-                  <a:srgbClr val="FFFFFF"/>
+              <a:rPr sz="1100" b="1" i="0">
+                <a:solidFill>
+                  <a:srgbClr val="0B2D5B"/>
                 </a:solidFill>
                 <a:latin typeface="Segoe UI"/>
               </a:rPr>
@@ -13331,7 +13804,9 @@
             <a:ext cx="2468880" cy="914400"/>
           </a:xfrm>
           <a:prstGeom prst="roundRect">
-            <a:avLst/>
+            <a:avLst>
+              <a:gd name="adj" fmla="val 10000"/>
+            </a:avLst>
           </a:prstGeom>
           <a:solidFill>
             <a:srgbClr val="1E7A3C"/>
@@ -13360,7 +13835,7 @@
           <a:p>
             <a:pPr algn="ctr"/>
             <a:r>
-              <a:rPr sz="1100" b="0">
+              <a:rPr sz="1100" b="0" i="0">
                 <a:solidFill>
                   <a:srgbClr val="FFFFFF"/>
                 </a:solidFill>
@@ -13383,7 +13858,9 @@
             <a:ext cx="2468880" cy="1097280"/>
           </a:xfrm>
           <a:prstGeom prst="roundRect">
-            <a:avLst/>
+            <a:avLst>
+              <a:gd name="adj" fmla="val 10000"/>
+            </a:avLst>
           </a:prstGeom>
           <a:solidFill>
             <a:srgbClr val="C0392B"/>
@@ -13412,7 +13889,7 @@
           <a:p>
             <a:pPr algn="ctr"/>
             <a:r>
-              <a:rPr sz="1100" b="0">
+              <a:rPr sz="1100" b="0" i="0">
                 <a:solidFill>
                   <a:srgbClr val="FFFFFF"/>
                 </a:solidFill>
@@ -13445,11 +13922,18 @@
           </a:bodyPr>
           <a:lstStyle/>
           <a:p>
-            <a:pPr algn="l"/>
-            <a:r>
-              <a:rPr sz="1100" b="0">
-                <a:solidFill>
-                  <a:srgbClr val="1A1A1A"/>
+            <a:pPr algn="l">
+              <a:lnSpc>
+                <a:spcPct val="112000"/>
+              </a:lnSpc>
+              <a:spcAft>
+                <a:spcPts val="500"/>
+              </a:spcAft>
+            </a:pPr>
+            <a:r>
+              <a:rPr sz="1100" b="0" i="0">
+                <a:solidFill>
+                  <a:srgbClr val="445063"/>
                 </a:solidFill>
                 <a:latin typeface="Segoe UI"/>
               </a:rPr>
@@ -13457,11 +13941,18 @@
             </a:r>
           </a:p>
           <a:p>
-            <a:pPr algn="l"/>
-            <a:r>
-              <a:rPr sz="1100" b="0">
-                <a:solidFill>
-                  <a:srgbClr val="1A1A1A"/>
+            <a:pPr algn="l">
+              <a:lnSpc>
+                <a:spcPct val="112000"/>
+              </a:lnSpc>
+              <a:spcAft>
+                <a:spcPts val="500"/>
+              </a:spcAft>
+            </a:pPr>
+            <a:r>
+              <a:rPr sz="1100" b="0" i="0">
+                <a:solidFill>
+                  <a:srgbClr val="445063"/>
                 </a:solidFill>
                 <a:latin typeface="Segoe UI"/>
               </a:rPr>
@@ -13478,8 +13969,8 @@
         </p:nvSpPr>
         <p:spPr>
           <a:xfrm>
-            <a:off x="457200" y="6400800"/>
-            <a:ext cx="11247120" cy="411480"/>
+            <a:off x="457200" y="6355080"/>
+            <a:ext cx="11247120" cy="457200"/>
           </a:xfrm>
           <a:prstGeom prst="rect">
             <a:avLst/>
@@ -13494,7 +13985,7 @@
           <a:p>
             <a:pPr algn="l"/>
             <a:r>
-              <a:rPr sz="800" b="0">
+              <a:rPr sz="700" b="0" i="0">
                 <a:solidFill>
                   <a:srgbClr val="8A8A8A"/>
                 </a:solidFill>

--- a/deck/SHB-CreditOps-EvidenceGraph-pitch.pptx
+++ b/deck/SHB-CreditOps-EvidenceGraph-pitch.pptx
@@ -4942,7 +4942,7 @@
             <a:r>
               <a:rPr sz="700" b="0" i="0">
                 <a:solidFill>
-                  <a:srgbClr val="8A8A8A"/>
+                  <a:srgbClr val="445063"/>
                 </a:solidFill>
                 <a:latin typeface="Segoe UI"/>
               </a:rPr>
@@ -5955,7 +5955,7 @@
             <a:r>
               <a:rPr sz="700" b="0" i="0">
                 <a:solidFill>
-                  <a:srgbClr val="8A8A8A"/>
+                  <a:srgbClr val="445063"/>
                 </a:solidFill>
                 <a:latin typeface="Segoe UI"/>
               </a:rPr>
@@ -6607,7 +6607,7 @@
             <a:r>
               <a:rPr sz="700" b="0" i="0">
                 <a:solidFill>
-                  <a:srgbClr val="8A8A8A"/>
+                  <a:srgbClr val="445063"/>
                 </a:solidFill>
                 <a:latin typeface="Segoe UI"/>
               </a:rPr>
@@ -7313,7 +7313,7 @@
             <a:r>
               <a:rPr sz="700" b="0" i="0">
                 <a:solidFill>
-                  <a:srgbClr val="8A8A8A"/>
+                  <a:srgbClr val="445063"/>
                 </a:solidFill>
                 <a:latin typeface="Segoe UI"/>
               </a:rPr>
@@ -7325,7 +7325,7 @@
             <a:r>
               <a:rPr sz="700" b="0" i="0">
                 <a:solidFill>
-                  <a:srgbClr val="8A8A8A"/>
+                  <a:srgbClr val="445063"/>
                 </a:solidFill>
                 <a:latin typeface="Segoe UI"/>
               </a:rPr>
@@ -7708,7 +7708,7 @@
             <a:r>
               <a:rPr sz="700" b="0" i="0">
                 <a:solidFill>
-                  <a:srgbClr val="8A8A8A"/>
+                  <a:srgbClr val="445063"/>
                 </a:solidFill>
                 <a:latin typeface="Segoe UI"/>
               </a:rPr>
@@ -7987,7 +7987,7 @@
             <a:r>
               <a:rPr sz="700" b="0" i="0">
                 <a:solidFill>
-                  <a:srgbClr val="8A8A8A"/>
+                  <a:srgbClr val="445063"/>
                 </a:solidFill>
                 <a:latin typeface="Segoe UI"/>
               </a:rPr>
@@ -8500,7 +8500,7 @@
             <a:r>
               <a:rPr sz="700" b="0" i="0">
                 <a:solidFill>
-                  <a:srgbClr val="8A8A8A"/>
+                  <a:srgbClr val="445063"/>
                 </a:solidFill>
                 <a:latin typeface="Segoe UI"/>
               </a:rPr>
@@ -9152,7 +9152,7 @@
             <a:r>
               <a:rPr sz="700" b="0" i="0">
                 <a:solidFill>
-                  <a:srgbClr val="8A8A8A"/>
+                  <a:srgbClr val="445063"/>
                 </a:solidFill>
                 <a:latin typeface="Segoe UI"/>
               </a:rPr>
@@ -9776,7 +9776,7 @@
             <a:r>
               <a:rPr sz="700" b="0" i="0">
                 <a:solidFill>
-                  <a:srgbClr val="8A8A8A"/>
+                  <a:srgbClr val="445063"/>
                 </a:solidFill>
                 <a:latin typeface="Segoe UI"/>
               </a:rPr>
@@ -10214,7 +10214,7 @@
             <a:r>
               <a:rPr sz="700" b="0" i="0">
                 <a:solidFill>
-                  <a:srgbClr val="8A8A8A"/>
+                  <a:srgbClr val="445063"/>
                 </a:solidFill>
                 <a:latin typeface="Segoe UI"/>
               </a:rPr>
@@ -10941,7 +10941,7 @@
             <a:r>
               <a:rPr sz="700" b="0" i="0">
                 <a:solidFill>
-                  <a:srgbClr val="8A8A8A"/>
+                  <a:srgbClr val="445063"/>
                 </a:solidFill>
                 <a:latin typeface="Segoe UI"/>
               </a:rPr>
@@ -10953,7 +10953,7 @@
             <a:r>
               <a:rPr sz="700" b="0" i="0">
                 <a:solidFill>
-                  <a:srgbClr val="8A8A8A"/>
+                  <a:srgbClr val="445063"/>
                 </a:solidFill>
                 <a:latin typeface="Segoe UI"/>
               </a:rPr>
@@ -11293,7 +11293,7 @@
             <a:r>
               <a:rPr sz="1100" b="0" i="0">
                 <a:solidFill>
-                  <a:srgbClr val="1A1A1A"/>
+                  <a:srgbClr val="445063"/>
                 </a:solidFill>
                 <a:latin typeface="Segoe UI"/>
               </a:rPr>
@@ -11312,7 +11312,7 @@
             <a:r>
               <a:rPr sz="1100" b="0" i="0">
                 <a:solidFill>
-                  <a:srgbClr val="1A1A1A"/>
+                  <a:srgbClr val="445063"/>
                 </a:solidFill>
                 <a:latin typeface="Segoe UI"/>
               </a:rPr>
@@ -11331,7 +11331,7 @@
             <a:r>
               <a:rPr sz="1100" b="0" i="0">
                 <a:solidFill>
-                  <a:srgbClr val="1A1A1A"/>
+                  <a:srgbClr val="445063"/>
                 </a:solidFill>
                 <a:latin typeface="Segoe UI"/>
               </a:rPr>
@@ -11350,7 +11350,7 @@
             <a:r>
               <a:rPr sz="1100" b="0" i="0">
                 <a:solidFill>
-                  <a:srgbClr val="1A1A1A"/>
+                  <a:srgbClr val="445063"/>
                 </a:solidFill>
                 <a:latin typeface="Segoe UI"/>
               </a:rPr>
@@ -11369,7 +11369,7 @@
             <a:r>
               <a:rPr sz="1100" b="0" i="0">
                 <a:solidFill>
-                  <a:srgbClr val="1A1A1A"/>
+                  <a:srgbClr val="445063"/>
                 </a:solidFill>
                 <a:latin typeface="Segoe UI"/>
               </a:rPr>
@@ -11388,7 +11388,7 @@
             <a:r>
               <a:rPr sz="1100" b="0" i="0">
                 <a:solidFill>
-                  <a:srgbClr val="1A1A1A"/>
+                  <a:srgbClr val="445063"/>
                 </a:solidFill>
                 <a:latin typeface="Segoe UI"/>
               </a:rPr>
@@ -11585,7 +11585,7 @@
             <a:r>
               <a:rPr sz="700" b="0" i="0">
                 <a:solidFill>
-                  <a:srgbClr val="8A8A8A"/>
+                  <a:srgbClr val="445063"/>
                 </a:solidFill>
                 <a:latin typeface="Segoe UI"/>
               </a:rPr>
@@ -11597,7 +11597,7 @@
             <a:r>
               <a:rPr sz="700" b="0" i="0">
                 <a:solidFill>
-                  <a:srgbClr val="8A8A8A"/>
+                  <a:srgbClr val="445063"/>
                 </a:solidFill>
                 <a:latin typeface="Segoe UI"/>
               </a:rPr>
@@ -12061,7 +12061,7 @@
             <a:r>
               <a:rPr sz="700" b="0" i="0">
                 <a:solidFill>
-                  <a:srgbClr val="8A8A8A"/>
+                  <a:srgbClr val="445063"/>
                 </a:solidFill>
                 <a:latin typeface="Segoe UI"/>
               </a:rPr>
@@ -12073,7 +12073,7 @@
             <a:r>
               <a:rPr sz="700" b="0" i="0">
                 <a:solidFill>
-                  <a:srgbClr val="8A8A8A"/>
+                  <a:srgbClr val="445063"/>
                 </a:solidFill>
                 <a:latin typeface="Segoe UI"/>
               </a:rPr>
@@ -12631,7 +12631,7 @@
             <a:r>
               <a:rPr sz="700" b="0" i="0">
                 <a:solidFill>
-                  <a:srgbClr val="8A8A8A"/>
+                  <a:srgbClr val="445063"/>
                 </a:solidFill>
                 <a:latin typeface="Segoe UI"/>
               </a:rPr>
@@ -13340,7 +13340,7 @@
             <a:r>
               <a:rPr sz="700" b="0" i="0">
                 <a:solidFill>
-                  <a:srgbClr val="8A8A8A"/>
+                  <a:srgbClr val="445063"/>
                 </a:solidFill>
                 <a:latin typeface="Segoe UI"/>
               </a:rPr>
@@ -13352,7 +13352,7 @@
             <a:r>
               <a:rPr sz="700" b="0" i="0">
                 <a:solidFill>
-                  <a:srgbClr val="8A8A8A"/>
+                  <a:srgbClr val="445063"/>
                 </a:solidFill>
                 <a:latin typeface="Segoe UI"/>
               </a:rPr>
@@ -13987,7 +13987,7 @@
             <a:r>
               <a:rPr sz="700" b="0" i="0">
                 <a:solidFill>
-                  <a:srgbClr val="8A8A8A"/>
+                  <a:srgbClr val="445063"/>
                 </a:solidFill>
                 <a:latin typeface="Segoe UI"/>
               </a:rPr>
